--- a/projects/cns-pharmacology-practical/slides/ch07-anxiolytics-hypnotics.pptx
+++ b/projects/cns-pharmacology-practical/slides/ch07-anxiolytics-hypnotics.pptx
@@ -7203,7 +7203,7 @@
                 </a:solidFill>
                 <a:latin typeface="Calibri"/>
               </a:rPr>
-              <a:t>45 minutes  ·  10 questions</a:t>
+              <a:t>120 minutes  ·  10 questions</a:t>
             </a:r>
           </a:p>
         </p:txBody>
@@ -13437,7 +13437,7 @@
                 </a:solidFill>
                 <a:latin typeface="Cambria"/>
               </a:rPr>
-              <a:t>45</a:t>
+              <a:t>120</a:t>
             </a:r>
           </a:p>
           <a:p>

--- a/projects/cns-pharmacology-practical/slides/ch07-anxiolytics-hypnotics.pptx
+++ b/projects/cns-pharmacology-practical/slides/ch07-anxiolytics-hypnotics.pptx
@@ -5632,6 +5632,110 @@
       </p:pic>
       <p:sp>
         <p:nvSpPr>
+          <p:cNvPr id="10" name="Rounded Rectangle 9"/>
+          <p:cNvSpPr/>
+          <p:nvPr/>
+        </p:nvSpPr>
+        <p:spPr>
+          <a:xfrm>
+            <a:off x="4251960" y="548640"/>
+            <a:ext cx="7635240" cy="5715000"/>
+          </a:xfrm>
+          <a:prstGeom prst="roundRect">
+            <a:avLst>
+              <a:gd name="adj" fmla="val 4000"/>
+            </a:avLst>
+          </a:prstGeom>
+          <a:solidFill>
+            <a:srgbClr val="FFFFFF">
+              <a:alpha val="84000"/>
+            </a:srgbClr>
+          </a:solidFill>
+          <a:ln w="19050">
+            <a:solidFill>
+              <a:srgbClr val="FFFFFF"/>
+            </a:solidFill>
+          </a:ln>
+          <a:effectLst>
+            <a:outerShdw blurRad="203200" dist="50800" dir="5400000" algn="t" rotWithShape="0">
+              <a:srgbClr val="1A2340">
+                <a:alpha val="20000"/>
+              </a:srgbClr>
+            </a:outerShdw>
+          </a:effectLst>
+        </p:spPr>
+        <p:style>
+          <a:lnRef idx="1">
+            <a:schemeClr val="accent1"/>
+          </a:lnRef>
+          <a:fillRef idx="3">
+            <a:schemeClr val="accent1"/>
+          </a:fillRef>
+          <a:effectRef idx="2">
+            <a:schemeClr val="accent1"/>
+          </a:effectRef>
+          <a:fontRef idx="minor">
+            <a:schemeClr val="lt1"/>
+          </a:fontRef>
+        </p:style>
+        <p:txBody>
+          <a:bodyPr rtlCol="0" anchor="ctr"/>
+          <a:lstStyle/>
+          <a:p>
+            <a:pPr algn="ctr"/>
+          </a:p>
+        </p:txBody>
+      </p:sp>
+      <p:sp>
+        <p:nvSpPr>
+          <p:cNvPr id="11" name="Rounded Rectangle 10"/>
+          <p:cNvSpPr/>
+          <p:nvPr/>
+        </p:nvSpPr>
+        <p:spPr>
+          <a:xfrm>
+            <a:off x="4572000" y="612647"/>
+            <a:ext cx="6995159" cy="32004"/>
+          </a:xfrm>
+          <a:prstGeom prst="roundRect">
+            <a:avLst>
+              <a:gd name="adj" fmla="val 50000"/>
+            </a:avLst>
+          </a:prstGeom>
+          <a:solidFill>
+            <a:srgbClr val="FFFFFF">
+              <a:alpha val="85000"/>
+            </a:srgbClr>
+          </a:solidFill>
+          <a:ln>
+            <a:noFill/>
+          </a:ln>
+          <a:effectLst/>
+        </p:spPr>
+        <p:style>
+          <a:lnRef idx="1">
+            <a:schemeClr val="accent1"/>
+          </a:lnRef>
+          <a:fillRef idx="3">
+            <a:schemeClr val="accent1"/>
+          </a:fillRef>
+          <a:effectRef idx="2">
+            <a:schemeClr val="accent1"/>
+          </a:effectRef>
+          <a:fontRef idx="minor">
+            <a:schemeClr val="lt1"/>
+          </a:fontRef>
+        </p:style>
+        <p:txBody>
+          <a:bodyPr rtlCol="0" anchor="ctr"/>
+          <a:lstStyle/>
+          <a:p>
+            <a:pPr algn="ctr"/>
+          </a:p>
+        </p:txBody>
+      </p:sp>
+      <p:sp>
+        <p:nvSpPr>
           <p:cNvPr id="3" name="Rectangle 2"/>
           <p:cNvSpPr/>
           <p:nvPr/>
@@ -6266,9 +6370,113 @@
           </a:prstGeom>
         </p:spPr>
       </p:pic>
+      <p:sp>
+        <p:nvSpPr>
+          <p:cNvPr id="11" name="Rounded Rectangle 10"/>
+          <p:cNvSpPr/>
+          <p:nvPr/>
+        </p:nvSpPr>
+        <p:spPr>
+          <a:xfrm>
+            <a:off x="411479" y="1444752"/>
+            <a:ext cx="11368735" cy="4800600"/>
+          </a:xfrm>
+          <a:prstGeom prst="roundRect">
+            <a:avLst>
+              <a:gd name="adj" fmla="val 4000"/>
+            </a:avLst>
+          </a:prstGeom>
+          <a:solidFill>
+            <a:srgbClr val="FFFFFF">
+              <a:alpha val="84000"/>
+            </a:srgbClr>
+          </a:solidFill>
+          <a:ln w="19050">
+            <a:solidFill>
+              <a:srgbClr val="FFFFFF"/>
+            </a:solidFill>
+          </a:ln>
+          <a:effectLst>
+            <a:outerShdw blurRad="203200" dist="50800" dir="5400000" algn="t" rotWithShape="0">
+              <a:srgbClr val="1A2340">
+                <a:alpha val="20000"/>
+              </a:srgbClr>
+            </a:outerShdw>
+          </a:effectLst>
+        </p:spPr>
+        <p:style>
+          <a:lnRef idx="1">
+            <a:schemeClr val="accent1"/>
+          </a:lnRef>
+          <a:fillRef idx="3">
+            <a:schemeClr val="accent1"/>
+          </a:fillRef>
+          <a:effectRef idx="2">
+            <a:schemeClr val="accent1"/>
+          </a:effectRef>
+          <a:fontRef idx="minor">
+            <a:schemeClr val="lt1"/>
+          </a:fontRef>
+        </p:style>
+        <p:txBody>
+          <a:bodyPr rtlCol="0" anchor="ctr"/>
+          <a:lstStyle/>
+          <a:p>
+            <a:pPr algn="ctr"/>
+          </a:p>
+        </p:txBody>
+      </p:sp>
+      <p:sp>
+        <p:nvSpPr>
+          <p:cNvPr id="12" name="Rounded Rectangle 11"/>
+          <p:cNvSpPr/>
+          <p:nvPr/>
+        </p:nvSpPr>
+        <p:spPr>
+          <a:xfrm>
+            <a:off x="731519" y="1508760"/>
+            <a:ext cx="10728655" cy="32004"/>
+          </a:xfrm>
+          <a:prstGeom prst="roundRect">
+            <a:avLst>
+              <a:gd name="adj" fmla="val 50000"/>
+            </a:avLst>
+          </a:prstGeom>
+          <a:solidFill>
+            <a:srgbClr val="FFFFFF">
+              <a:alpha val="85000"/>
+            </a:srgbClr>
+          </a:solidFill>
+          <a:ln>
+            <a:noFill/>
+          </a:ln>
+          <a:effectLst/>
+        </p:spPr>
+        <p:style>
+          <a:lnRef idx="1">
+            <a:schemeClr val="accent1"/>
+          </a:lnRef>
+          <a:fillRef idx="3">
+            <a:schemeClr val="accent1"/>
+          </a:fillRef>
+          <a:effectRef idx="2">
+            <a:schemeClr val="accent1"/>
+          </a:effectRef>
+          <a:fontRef idx="minor">
+            <a:schemeClr val="lt1"/>
+          </a:fontRef>
+        </p:style>
+        <p:txBody>
+          <a:bodyPr rtlCol="0" anchor="ctr"/>
+          <a:lstStyle/>
+          <a:p>
+            <a:pPr algn="ctr"/>
+          </a:p>
+        </p:txBody>
+      </p:sp>
       <p:graphicFrame>
         <p:nvGraphicFramePr>
-          <p:cNvPr id="11" name="Table 10"/>
+          <p:cNvPr id="13" name="Table 12"/>
           <p:cNvGraphicFramePr>
             <a:graphicFrameLocks noGrp="1"/>
           </p:cNvGraphicFramePr>
@@ -7307,14 +7515,177 @@
       </p:pic>
       <p:sp>
         <p:nvSpPr>
-          <p:cNvPr id="11" name="TextBox 10"/>
+          <p:cNvPr id="11" name="Rounded Rectangle 10"/>
+          <p:cNvSpPr/>
+          <p:nvPr/>
+        </p:nvSpPr>
+        <p:spPr>
+          <a:xfrm>
+            <a:off x="411479" y="1444752"/>
+            <a:ext cx="11368735" cy="4800600"/>
+          </a:xfrm>
+          <a:prstGeom prst="roundRect">
+            <a:avLst>
+              <a:gd name="adj" fmla="val 4000"/>
+            </a:avLst>
+          </a:prstGeom>
+          <a:solidFill>
+            <a:srgbClr val="FFFFFF">
+              <a:alpha val="84000"/>
+            </a:srgbClr>
+          </a:solidFill>
+          <a:ln w="19050">
+            <a:solidFill>
+              <a:srgbClr val="FFFFFF"/>
+            </a:solidFill>
+          </a:ln>
+          <a:effectLst>
+            <a:outerShdw blurRad="203200" dist="50800" dir="5400000" algn="t" rotWithShape="0">
+              <a:srgbClr val="1A2340">
+                <a:alpha val="20000"/>
+              </a:srgbClr>
+            </a:outerShdw>
+          </a:effectLst>
+        </p:spPr>
+        <p:style>
+          <a:lnRef idx="1">
+            <a:schemeClr val="accent1"/>
+          </a:lnRef>
+          <a:fillRef idx="3">
+            <a:schemeClr val="accent1"/>
+          </a:fillRef>
+          <a:effectRef idx="2">
+            <a:schemeClr val="accent1"/>
+          </a:effectRef>
+          <a:fontRef idx="minor">
+            <a:schemeClr val="lt1"/>
+          </a:fontRef>
+        </p:style>
+        <p:txBody>
+          <a:bodyPr rtlCol="0" anchor="ctr"/>
+          <a:lstStyle/>
+          <a:p>
+            <a:pPr algn="ctr"/>
+          </a:p>
+        </p:txBody>
+      </p:sp>
+      <p:sp>
+        <p:nvSpPr>
+          <p:cNvPr id="12" name="Rounded Rectangle 11"/>
+          <p:cNvSpPr/>
+          <p:nvPr/>
+        </p:nvSpPr>
+        <p:spPr>
+          <a:xfrm>
+            <a:off x="731519" y="1508760"/>
+            <a:ext cx="10728655" cy="32004"/>
+          </a:xfrm>
+          <a:prstGeom prst="roundRect">
+            <a:avLst>
+              <a:gd name="adj" fmla="val 50000"/>
+            </a:avLst>
+          </a:prstGeom>
+          <a:solidFill>
+            <a:srgbClr val="FFFFFF">
+              <a:alpha val="85000"/>
+            </a:srgbClr>
+          </a:solidFill>
+          <a:ln>
+            <a:noFill/>
+          </a:ln>
+          <a:effectLst/>
+        </p:spPr>
+        <p:style>
+          <a:lnRef idx="1">
+            <a:schemeClr val="accent1"/>
+          </a:lnRef>
+          <a:fillRef idx="3">
+            <a:schemeClr val="accent1"/>
+          </a:fillRef>
+          <a:effectRef idx="2">
+            <a:schemeClr val="accent1"/>
+          </a:effectRef>
+          <a:fontRef idx="minor">
+            <a:schemeClr val="lt1"/>
+          </a:fontRef>
+        </p:style>
+        <p:txBody>
+          <a:bodyPr rtlCol="0" anchor="ctr"/>
+          <a:lstStyle/>
+          <a:p>
+            <a:pPr algn="ctr"/>
+          </a:p>
+        </p:txBody>
+      </p:sp>
+      <p:sp>
+        <p:nvSpPr>
+          <p:cNvPr id="13" name="Rounded Rectangle 12"/>
+          <p:cNvSpPr/>
+          <p:nvPr/>
+        </p:nvSpPr>
+        <p:spPr>
+          <a:xfrm>
+            <a:off x="548640" y="1591056"/>
+            <a:ext cx="64008" cy="873252"/>
+          </a:xfrm>
+          <a:prstGeom prst="roundRect">
+            <a:avLst>
+              <a:gd name="adj" fmla="val 50000"/>
+            </a:avLst>
+          </a:prstGeom>
+          <a:solidFill>
+            <a:srgbClr val="8D6A2A"/>
+          </a:solidFill>
+          <a:ln>
+            <a:noFill/>
+          </a:ln>
+          <a:effectLst>
+            <a:outerShdw blurRad="203200" dist="50800" dir="5400000" algn="t" rotWithShape="0">
+              <a:srgbClr val="1A2340">
+                <a:alpha val="20000"/>
+              </a:srgbClr>
+            </a:outerShdw>
+          </a:effectLst>
+          <a:scene3d>
+            <a:camera prst="orthographicFront"/>
+            <a:lightRig rig="threePt" dir="t"/>
+          </a:scene3d>
+          <a:sp3d>
+            <a:bevelT w="44450" h="25400" prst="softRound"/>
+          </a:sp3d>
+        </p:spPr>
+        <p:style>
+          <a:lnRef idx="1">
+            <a:schemeClr val="accent1"/>
+          </a:lnRef>
+          <a:fillRef idx="3">
+            <a:schemeClr val="accent1"/>
+          </a:fillRef>
+          <a:effectRef idx="2">
+            <a:schemeClr val="accent1"/>
+          </a:effectRef>
+          <a:fontRef idx="minor">
+            <a:schemeClr val="lt1"/>
+          </a:fontRef>
+        </p:style>
+        <p:txBody>
+          <a:bodyPr rtlCol="0" anchor="ctr"/>
+          <a:lstStyle/>
+          <a:p>
+            <a:pPr algn="ctr"/>
+          </a:p>
+        </p:txBody>
+      </p:sp>
+      <p:sp>
+        <p:nvSpPr>
+          <p:cNvPr id="14" name="TextBox 13"/>
           <p:cNvSpPr txBox="1"/>
           <p:nvPr/>
         </p:nvSpPr>
         <p:spPr>
           <a:xfrm>
-            <a:off x="548640" y="1554480"/>
-            <a:ext cx="11094415" cy="1389888"/>
+            <a:off x="777240" y="1554480"/>
+            <a:ext cx="10865815" cy="1389888"/>
           </a:xfrm>
           <a:prstGeom prst="rect">
             <a:avLst/>
@@ -7364,7 +7735,7 @@
       </p:sp>
       <p:graphicFrame>
         <p:nvGraphicFramePr>
-          <p:cNvPr id="12" name="Table 11"/>
+          <p:cNvPr id="15" name="Table 14"/>
           <p:cNvGraphicFramePr>
             <a:graphicFrameLocks noGrp="1"/>
           </p:cNvGraphicFramePr>
@@ -8044,14 +8415,177 @@
       </p:pic>
       <p:sp>
         <p:nvSpPr>
-          <p:cNvPr id="11" name="TextBox 10"/>
+          <p:cNvPr id="11" name="Rounded Rectangle 10"/>
+          <p:cNvSpPr/>
+          <p:nvPr/>
+        </p:nvSpPr>
+        <p:spPr>
+          <a:xfrm>
+            <a:off x="411479" y="1444752"/>
+            <a:ext cx="11368735" cy="4800600"/>
+          </a:xfrm>
+          <a:prstGeom prst="roundRect">
+            <a:avLst>
+              <a:gd name="adj" fmla="val 4000"/>
+            </a:avLst>
+          </a:prstGeom>
+          <a:solidFill>
+            <a:srgbClr val="FFFFFF">
+              <a:alpha val="84000"/>
+            </a:srgbClr>
+          </a:solidFill>
+          <a:ln w="19050">
+            <a:solidFill>
+              <a:srgbClr val="FFFFFF"/>
+            </a:solidFill>
+          </a:ln>
+          <a:effectLst>
+            <a:outerShdw blurRad="203200" dist="50800" dir="5400000" algn="t" rotWithShape="0">
+              <a:srgbClr val="1A2340">
+                <a:alpha val="20000"/>
+              </a:srgbClr>
+            </a:outerShdw>
+          </a:effectLst>
+        </p:spPr>
+        <p:style>
+          <a:lnRef idx="1">
+            <a:schemeClr val="accent1"/>
+          </a:lnRef>
+          <a:fillRef idx="3">
+            <a:schemeClr val="accent1"/>
+          </a:fillRef>
+          <a:effectRef idx="2">
+            <a:schemeClr val="accent1"/>
+          </a:effectRef>
+          <a:fontRef idx="minor">
+            <a:schemeClr val="lt1"/>
+          </a:fontRef>
+        </p:style>
+        <p:txBody>
+          <a:bodyPr rtlCol="0" anchor="ctr"/>
+          <a:lstStyle/>
+          <a:p>
+            <a:pPr algn="ctr"/>
+          </a:p>
+        </p:txBody>
+      </p:sp>
+      <p:sp>
+        <p:nvSpPr>
+          <p:cNvPr id="12" name="Rounded Rectangle 11"/>
+          <p:cNvSpPr/>
+          <p:nvPr/>
+        </p:nvSpPr>
+        <p:spPr>
+          <a:xfrm>
+            <a:off x="731519" y="1508760"/>
+            <a:ext cx="10728655" cy="32004"/>
+          </a:xfrm>
+          <a:prstGeom prst="roundRect">
+            <a:avLst>
+              <a:gd name="adj" fmla="val 50000"/>
+            </a:avLst>
+          </a:prstGeom>
+          <a:solidFill>
+            <a:srgbClr val="FFFFFF">
+              <a:alpha val="85000"/>
+            </a:srgbClr>
+          </a:solidFill>
+          <a:ln>
+            <a:noFill/>
+          </a:ln>
+          <a:effectLst/>
+        </p:spPr>
+        <p:style>
+          <a:lnRef idx="1">
+            <a:schemeClr val="accent1"/>
+          </a:lnRef>
+          <a:fillRef idx="3">
+            <a:schemeClr val="accent1"/>
+          </a:fillRef>
+          <a:effectRef idx="2">
+            <a:schemeClr val="accent1"/>
+          </a:effectRef>
+          <a:fontRef idx="minor">
+            <a:schemeClr val="lt1"/>
+          </a:fontRef>
+        </p:style>
+        <p:txBody>
+          <a:bodyPr rtlCol="0" anchor="ctr"/>
+          <a:lstStyle/>
+          <a:p>
+            <a:pPr algn="ctr"/>
+          </a:p>
+        </p:txBody>
+      </p:sp>
+      <p:sp>
+        <p:nvSpPr>
+          <p:cNvPr id="13" name="Rounded Rectangle 12"/>
+          <p:cNvSpPr/>
+          <p:nvPr/>
+        </p:nvSpPr>
+        <p:spPr>
+          <a:xfrm>
+            <a:off x="548640" y="1591056"/>
+            <a:ext cx="64008" cy="1152144"/>
+          </a:xfrm>
+          <a:prstGeom prst="roundRect">
+            <a:avLst>
+              <a:gd name="adj" fmla="val 50000"/>
+            </a:avLst>
+          </a:prstGeom>
+          <a:solidFill>
+            <a:srgbClr val="8D6A2A"/>
+          </a:solidFill>
+          <a:ln>
+            <a:noFill/>
+          </a:ln>
+          <a:effectLst>
+            <a:outerShdw blurRad="203200" dist="50800" dir="5400000" algn="t" rotWithShape="0">
+              <a:srgbClr val="1A2340">
+                <a:alpha val="20000"/>
+              </a:srgbClr>
+            </a:outerShdw>
+          </a:effectLst>
+          <a:scene3d>
+            <a:camera prst="orthographicFront"/>
+            <a:lightRig rig="threePt" dir="t"/>
+          </a:scene3d>
+          <a:sp3d>
+            <a:bevelT w="44450" h="25400" prst="softRound"/>
+          </a:sp3d>
+        </p:spPr>
+        <p:style>
+          <a:lnRef idx="1">
+            <a:schemeClr val="accent1"/>
+          </a:lnRef>
+          <a:fillRef idx="3">
+            <a:schemeClr val="accent1"/>
+          </a:fillRef>
+          <a:effectRef idx="2">
+            <a:schemeClr val="accent1"/>
+          </a:effectRef>
+          <a:fontRef idx="minor">
+            <a:schemeClr val="lt1"/>
+          </a:fontRef>
+        </p:style>
+        <p:txBody>
+          <a:bodyPr rtlCol="0" anchor="ctr"/>
+          <a:lstStyle/>
+          <a:p>
+            <a:pPr algn="ctr"/>
+          </a:p>
+        </p:txBody>
+      </p:sp>
+      <p:sp>
+        <p:nvSpPr>
+          <p:cNvPr id="14" name="TextBox 13"/>
           <p:cNvSpPr txBox="1"/>
           <p:nvPr/>
         </p:nvSpPr>
         <p:spPr>
           <a:xfrm>
-            <a:off x="548640" y="1554480"/>
-            <a:ext cx="11094415" cy="1389888"/>
+            <a:off x="777240" y="1554480"/>
+            <a:ext cx="10865815" cy="1389888"/>
           </a:xfrm>
           <a:prstGeom prst="rect">
             <a:avLst/>
@@ -8101,7 +8635,7 @@
       </p:sp>
       <p:sp>
         <p:nvSpPr>
-          <p:cNvPr id="12" name="Oval 11"/>
+          <p:cNvPr id="15" name="Oval 14"/>
           <p:cNvSpPr/>
           <p:nvPr/>
         </p:nvSpPr>
@@ -8154,7 +8688,7 @@
       </p:sp>
       <p:sp>
         <p:nvSpPr>
-          <p:cNvPr id="13" name="TextBox 12"/>
+          <p:cNvPr id="16" name="TextBox 15"/>
           <p:cNvSpPr txBox="1"/>
           <p:nvPr/>
         </p:nvSpPr>
@@ -8197,7 +8731,7 @@
       </p:sp>
       <p:sp>
         <p:nvSpPr>
-          <p:cNvPr id="14" name="Oval 13"/>
+          <p:cNvPr id="17" name="Oval 16"/>
           <p:cNvSpPr/>
           <p:nvPr/>
         </p:nvSpPr>
@@ -8250,7 +8784,7 @@
       </p:sp>
       <p:sp>
         <p:nvSpPr>
-          <p:cNvPr id="15" name="TextBox 14"/>
+          <p:cNvPr id="18" name="TextBox 17"/>
           <p:cNvSpPr txBox="1"/>
           <p:nvPr/>
         </p:nvSpPr>
@@ -8293,7 +8827,7 @@
       </p:sp>
       <p:sp>
         <p:nvSpPr>
-          <p:cNvPr id="16" name="Oval 15"/>
+          <p:cNvPr id="19" name="Oval 18"/>
           <p:cNvSpPr/>
           <p:nvPr/>
         </p:nvSpPr>
@@ -8346,7 +8880,7 @@
       </p:sp>
       <p:sp>
         <p:nvSpPr>
-          <p:cNvPr id="17" name="TextBox 16"/>
+          <p:cNvPr id="20" name="TextBox 19"/>
           <p:cNvSpPr txBox="1"/>
           <p:nvPr/>
         </p:nvSpPr>
@@ -8776,6 +9310,110 @@
         </p:nvSpPr>
         <p:spPr>
           <a:xfrm>
+            <a:off x="411479" y="1444752"/>
+            <a:ext cx="11368735" cy="4800600"/>
+          </a:xfrm>
+          <a:prstGeom prst="roundRect">
+            <a:avLst>
+              <a:gd name="adj" fmla="val 4000"/>
+            </a:avLst>
+          </a:prstGeom>
+          <a:solidFill>
+            <a:srgbClr val="FFFFFF">
+              <a:alpha val="84000"/>
+            </a:srgbClr>
+          </a:solidFill>
+          <a:ln w="19050">
+            <a:solidFill>
+              <a:srgbClr val="FFFFFF"/>
+            </a:solidFill>
+          </a:ln>
+          <a:effectLst>
+            <a:outerShdw blurRad="203200" dist="50800" dir="5400000" algn="t" rotWithShape="0">
+              <a:srgbClr val="1A2340">
+                <a:alpha val="20000"/>
+              </a:srgbClr>
+            </a:outerShdw>
+          </a:effectLst>
+        </p:spPr>
+        <p:style>
+          <a:lnRef idx="1">
+            <a:schemeClr val="accent1"/>
+          </a:lnRef>
+          <a:fillRef idx="3">
+            <a:schemeClr val="accent1"/>
+          </a:fillRef>
+          <a:effectRef idx="2">
+            <a:schemeClr val="accent1"/>
+          </a:effectRef>
+          <a:fontRef idx="minor">
+            <a:schemeClr val="lt1"/>
+          </a:fontRef>
+        </p:style>
+        <p:txBody>
+          <a:bodyPr rtlCol="0" anchor="ctr"/>
+          <a:lstStyle/>
+          <a:p>
+            <a:pPr algn="ctr"/>
+          </a:p>
+        </p:txBody>
+      </p:sp>
+      <p:sp>
+        <p:nvSpPr>
+          <p:cNvPr id="12" name="Rounded Rectangle 11"/>
+          <p:cNvSpPr/>
+          <p:nvPr/>
+        </p:nvSpPr>
+        <p:spPr>
+          <a:xfrm>
+            <a:off x="731519" y="1508760"/>
+            <a:ext cx="10728655" cy="32004"/>
+          </a:xfrm>
+          <a:prstGeom prst="roundRect">
+            <a:avLst>
+              <a:gd name="adj" fmla="val 50000"/>
+            </a:avLst>
+          </a:prstGeom>
+          <a:solidFill>
+            <a:srgbClr val="FFFFFF">
+              <a:alpha val="85000"/>
+            </a:srgbClr>
+          </a:solidFill>
+          <a:ln>
+            <a:noFill/>
+          </a:ln>
+          <a:effectLst/>
+        </p:spPr>
+        <p:style>
+          <a:lnRef idx="1">
+            <a:schemeClr val="accent1"/>
+          </a:lnRef>
+          <a:fillRef idx="3">
+            <a:schemeClr val="accent1"/>
+          </a:fillRef>
+          <a:effectRef idx="2">
+            <a:schemeClr val="accent1"/>
+          </a:effectRef>
+          <a:fontRef idx="minor">
+            <a:schemeClr val="lt1"/>
+          </a:fontRef>
+        </p:style>
+        <p:txBody>
+          <a:bodyPr rtlCol="0" anchor="ctr"/>
+          <a:lstStyle/>
+          <a:p>
+            <a:pPr algn="ctr"/>
+          </a:p>
+        </p:txBody>
+      </p:sp>
+      <p:sp>
+        <p:nvSpPr>
+          <p:cNvPr id="13" name="Rounded Rectangle 12"/>
+          <p:cNvSpPr/>
+          <p:nvPr/>
+        </p:nvSpPr>
+        <p:spPr>
+          <a:xfrm>
             <a:off x="1645919" y="2103120"/>
             <a:ext cx="8899855" cy="3157728"/>
           </a:xfrm>
@@ -8826,7 +9464,7 @@
       </p:sp>
       <p:sp>
         <p:nvSpPr>
-          <p:cNvPr id="12" name="Rounded Rectangle 11"/>
+          <p:cNvPr id="14" name="Rounded Rectangle 13"/>
           <p:cNvSpPr/>
           <p:nvPr/>
         </p:nvSpPr>
@@ -8874,7 +9512,7 @@
       </p:sp>
       <p:sp>
         <p:nvSpPr>
-          <p:cNvPr id="13" name="Rounded Rectangle 12"/>
+          <p:cNvPr id="15" name="Rounded Rectangle 14"/>
           <p:cNvSpPr/>
           <p:nvPr/>
         </p:nvSpPr>
@@ -8942,7 +9580,7 @@
       </p:sp>
       <p:sp>
         <p:nvSpPr>
-          <p:cNvPr id="14" name="TextBox 13"/>
+          <p:cNvPr id="16" name="TextBox 15"/>
           <p:cNvSpPr txBox="1"/>
           <p:nvPr/>
         </p:nvSpPr>
@@ -9380,14 +10018,177 @@
       </p:pic>
       <p:sp>
         <p:nvSpPr>
-          <p:cNvPr id="11" name="TextBox 10"/>
+          <p:cNvPr id="11" name="Rounded Rectangle 10"/>
+          <p:cNvSpPr/>
+          <p:nvPr/>
+        </p:nvSpPr>
+        <p:spPr>
+          <a:xfrm>
+            <a:off x="411479" y="1444752"/>
+            <a:ext cx="11368735" cy="4800600"/>
+          </a:xfrm>
+          <a:prstGeom prst="roundRect">
+            <a:avLst>
+              <a:gd name="adj" fmla="val 4000"/>
+            </a:avLst>
+          </a:prstGeom>
+          <a:solidFill>
+            <a:srgbClr val="FFFFFF">
+              <a:alpha val="84000"/>
+            </a:srgbClr>
+          </a:solidFill>
+          <a:ln w="19050">
+            <a:solidFill>
+              <a:srgbClr val="FFFFFF"/>
+            </a:solidFill>
+          </a:ln>
+          <a:effectLst>
+            <a:outerShdw blurRad="203200" dist="50800" dir="5400000" algn="t" rotWithShape="0">
+              <a:srgbClr val="1A2340">
+                <a:alpha val="20000"/>
+              </a:srgbClr>
+            </a:outerShdw>
+          </a:effectLst>
+        </p:spPr>
+        <p:style>
+          <a:lnRef idx="1">
+            <a:schemeClr val="accent1"/>
+          </a:lnRef>
+          <a:fillRef idx="3">
+            <a:schemeClr val="accent1"/>
+          </a:fillRef>
+          <a:effectRef idx="2">
+            <a:schemeClr val="accent1"/>
+          </a:effectRef>
+          <a:fontRef idx="minor">
+            <a:schemeClr val="lt1"/>
+          </a:fontRef>
+        </p:style>
+        <p:txBody>
+          <a:bodyPr rtlCol="0" anchor="ctr"/>
+          <a:lstStyle/>
+          <a:p>
+            <a:pPr algn="ctr"/>
+          </a:p>
+        </p:txBody>
+      </p:sp>
+      <p:sp>
+        <p:nvSpPr>
+          <p:cNvPr id="12" name="Rounded Rectangle 11"/>
+          <p:cNvSpPr/>
+          <p:nvPr/>
+        </p:nvSpPr>
+        <p:spPr>
+          <a:xfrm>
+            <a:off x="731519" y="1508760"/>
+            <a:ext cx="10728655" cy="32004"/>
+          </a:xfrm>
+          <a:prstGeom prst="roundRect">
+            <a:avLst>
+              <a:gd name="adj" fmla="val 50000"/>
+            </a:avLst>
+          </a:prstGeom>
+          <a:solidFill>
+            <a:srgbClr val="FFFFFF">
+              <a:alpha val="85000"/>
+            </a:srgbClr>
+          </a:solidFill>
+          <a:ln>
+            <a:noFill/>
+          </a:ln>
+          <a:effectLst/>
+        </p:spPr>
+        <p:style>
+          <a:lnRef idx="1">
+            <a:schemeClr val="accent1"/>
+          </a:lnRef>
+          <a:fillRef idx="3">
+            <a:schemeClr val="accent1"/>
+          </a:fillRef>
+          <a:effectRef idx="2">
+            <a:schemeClr val="accent1"/>
+          </a:effectRef>
+          <a:fontRef idx="minor">
+            <a:schemeClr val="lt1"/>
+          </a:fontRef>
+        </p:style>
+        <p:txBody>
+          <a:bodyPr rtlCol="0" anchor="ctr"/>
+          <a:lstStyle/>
+          <a:p>
+            <a:pPr algn="ctr"/>
+          </a:p>
+        </p:txBody>
+      </p:sp>
+      <p:sp>
+        <p:nvSpPr>
+          <p:cNvPr id="13" name="Rounded Rectangle 12"/>
+          <p:cNvSpPr/>
+          <p:nvPr/>
+        </p:nvSpPr>
+        <p:spPr>
+          <a:xfrm>
+            <a:off x="548640" y="1591056"/>
+            <a:ext cx="64008" cy="315468"/>
+          </a:xfrm>
+          <a:prstGeom prst="roundRect">
+            <a:avLst>
+              <a:gd name="adj" fmla="val 50000"/>
+            </a:avLst>
+          </a:prstGeom>
+          <a:solidFill>
+            <a:srgbClr val="8D6A2A"/>
+          </a:solidFill>
+          <a:ln>
+            <a:noFill/>
+          </a:ln>
+          <a:effectLst>
+            <a:outerShdw blurRad="203200" dist="50800" dir="5400000" algn="t" rotWithShape="0">
+              <a:srgbClr val="1A2340">
+                <a:alpha val="20000"/>
+              </a:srgbClr>
+            </a:outerShdw>
+          </a:effectLst>
+          <a:scene3d>
+            <a:camera prst="orthographicFront"/>
+            <a:lightRig rig="threePt" dir="t"/>
+          </a:scene3d>
+          <a:sp3d>
+            <a:bevelT w="44450" h="25400" prst="softRound"/>
+          </a:sp3d>
+        </p:spPr>
+        <p:style>
+          <a:lnRef idx="1">
+            <a:schemeClr val="accent1"/>
+          </a:lnRef>
+          <a:fillRef idx="3">
+            <a:schemeClr val="accent1"/>
+          </a:fillRef>
+          <a:effectRef idx="2">
+            <a:schemeClr val="accent1"/>
+          </a:effectRef>
+          <a:fontRef idx="minor">
+            <a:schemeClr val="lt1"/>
+          </a:fontRef>
+        </p:style>
+        <p:txBody>
+          <a:bodyPr rtlCol="0" anchor="ctr"/>
+          <a:lstStyle/>
+          <a:p>
+            <a:pPr algn="ctr"/>
+          </a:p>
+        </p:txBody>
+      </p:sp>
+      <p:sp>
+        <p:nvSpPr>
+          <p:cNvPr id="14" name="TextBox 13"/>
           <p:cNvSpPr txBox="1"/>
           <p:nvPr/>
         </p:nvSpPr>
         <p:spPr>
           <a:xfrm>
-            <a:off x="548640" y="1554480"/>
-            <a:ext cx="11094415" cy="498348"/>
+            <a:off x="777240" y="1554480"/>
+            <a:ext cx="10865815" cy="498348"/>
           </a:xfrm>
           <a:prstGeom prst="rect">
             <a:avLst/>
@@ -9419,7 +10220,7 @@
       </p:sp>
       <p:sp>
         <p:nvSpPr>
-          <p:cNvPr id="12" name="Oval 11"/>
+          <p:cNvPr id="15" name="Oval 14"/>
           <p:cNvSpPr/>
           <p:nvPr/>
         </p:nvSpPr>
@@ -9472,7 +10273,7 @@
       </p:sp>
       <p:sp>
         <p:nvSpPr>
-          <p:cNvPr id="13" name="TextBox 12"/>
+          <p:cNvPr id="16" name="TextBox 15"/>
           <p:cNvSpPr txBox="1"/>
           <p:nvPr/>
         </p:nvSpPr>
@@ -9506,7 +10307,7 @@
       </p:sp>
       <p:sp>
         <p:nvSpPr>
-          <p:cNvPr id="14" name="Oval 13"/>
+          <p:cNvPr id="17" name="Oval 16"/>
           <p:cNvSpPr/>
           <p:nvPr/>
         </p:nvSpPr>
@@ -9559,7 +10360,7 @@
       </p:sp>
       <p:sp>
         <p:nvSpPr>
-          <p:cNvPr id="15" name="TextBox 14"/>
+          <p:cNvPr id="18" name="TextBox 17"/>
           <p:cNvSpPr txBox="1"/>
           <p:nvPr/>
         </p:nvSpPr>
@@ -9593,7 +10394,7 @@
       </p:sp>
       <p:sp>
         <p:nvSpPr>
-          <p:cNvPr id="16" name="Oval 15"/>
+          <p:cNvPr id="19" name="Oval 18"/>
           <p:cNvSpPr/>
           <p:nvPr/>
         </p:nvSpPr>
@@ -9646,7 +10447,7 @@
       </p:sp>
       <p:sp>
         <p:nvSpPr>
-          <p:cNvPr id="17" name="TextBox 16"/>
+          <p:cNvPr id="20" name="TextBox 19"/>
           <p:cNvSpPr txBox="1"/>
           <p:nvPr/>
         </p:nvSpPr>
@@ -9698,7 +10499,7 @@
       </p:sp>
       <p:sp>
         <p:nvSpPr>
-          <p:cNvPr id="18" name="Oval 17"/>
+          <p:cNvPr id="21" name="Oval 20"/>
           <p:cNvSpPr/>
           <p:nvPr/>
         </p:nvSpPr>
@@ -9751,7 +10552,7 @@
       </p:sp>
       <p:sp>
         <p:nvSpPr>
-          <p:cNvPr id="19" name="TextBox 18"/>
+          <p:cNvPr id="22" name="TextBox 21"/>
           <p:cNvSpPr txBox="1"/>
           <p:nvPr/>
         </p:nvSpPr>
@@ -10172,6 +10973,110 @@
         </p:nvSpPr>
         <p:spPr>
           <a:xfrm>
+            <a:off x="411479" y="1444752"/>
+            <a:ext cx="11368735" cy="4800600"/>
+          </a:xfrm>
+          <a:prstGeom prst="roundRect">
+            <a:avLst>
+              <a:gd name="adj" fmla="val 4000"/>
+            </a:avLst>
+          </a:prstGeom>
+          <a:solidFill>
+            <a:srgbClr val="FFFFFF">
+              <a:alpha val="84000"/>
+            </a:srgbClr>
+          </a:solidFill>
+          <a:ln w="19050">
+            <a:solidFill>
+              <a:srgbClr val="FFFFFF"/>
+            </a:solidFill>
+          </a:ln>
+          <a:effectLst>
+            <a:outerShdw blurRad="203200" dist="50800" dir="5400000" algn="t" rotWithShape="0">
+              <a:srgbClr val="1A2340">
+                <a:alpha val="20000"/>
+              </a:srgbClr>
+            </a:outerShdw>
+          </a:effectLst>
+        </p:spPr>
+        <p:style>
+          <a:lnRef idx="1">
+            <a:schemeClr val="accent1"/>
+          </a:lnRef>
+          <a:fillRef idx="3">
+            <a:schemeClr val="accent1"/>
+          </a:fillRef>
+          <a:effectRef idx="2">
+            <a:schemeClr val="accent1"/>
+          </a:effectRef>
+          <a:fontRef idx="minor">
+            <a:schemeClr val="lt1"/>
+          </a:fontRef>
+        </p:style>
+        <p:txBody>
+          <a:bodyPr rtlCol="0" anchor="ctr"/>
+          <a:lstStyle/>
+          <a:p>
+            <a:pPr algn="ctr"/>
+          </a:p>
+        </p:txBody>
+      </p:sp>
+      <p:sp>
+        <p:nvSpPr>
+          <p:cNvPr id="12" name="Rounded Rectangle 11"/>
+          <p:cNvSpPr/>
+          <p:nvPr/>
+        </p:nvSpPr>
+        <p:spPr>
+          <a:xfrm>
+            <a:off x="731519" y="1508760"/>
+            <a:ext cx="10728655" cy="32004"/>
+          </a:xfrm>
+          <a:prstGeom prst="roundRect">
+            <a:avLst>
+              <a:gd name="adj" fmla="val 50000"/>
+            </a:avLst>
+          </a:prstGeom>
+          <a:solidFill>
+            <a:srgbClr val="FFFFFF">
+              <a:alpha val="85000"/>
+            </a:srgbClr>
+          </a:solidFill>
+          <a:ln>
+            <a:noFill/>
+          </a:ln>
+          <a:effectLst/>
+        </p:spPr>
+        <p:style>
+          <a:lnRef idx="1">
+            <a:schemeClr val="accent1"/>
+          </a:lnRef>
+          <a:fillRef idx="3">
+            <a:schemeClr val="accent1"/>
+          </a:fillRef>
+          <a:effectRef idx="2">
+            <a:schemeClr val="accent1"/>
+          </a:effectRef>
+          <a:fontRef idx="minor">
+            <a:schemeClr val="lt1"/>
+          </a:fontRef>
+        </p:style>
+        <p:txBody>
+          <a:bodyPr rtlCol="0" anchor="ctr"/>
+          <a:lstStyle/>
+          <a:p>
+            <a:pPr algn="ctr"/>
+          </a:p>
+        </p:txBody>
+      </p:sp>
+      <p:sp>
+        <p:nvSpPr>
+          <p:cNvPr id="13" name="Rounded Rectangle 12"/>
+          <p:cNvSpPr/>
+          <p:nvPr/>
+        </p:nvSpPr>
+        <p:spPr>
+          <a:xfrm>
             <a:off x="1645919" y="2103120"/>
             <a:ext cx="8899855" cy="2431288"/>
           </a:xfrm>
@@ -10222,7 +11127,7 @@
       </p:sp>
       <p:sp>
         <p:nvSpPr>
-          <p:cNvPr id="12" name="Rounded Rectangle 11"/>
+          <p:cNvPr id="14" name="Rounded Rectangle 13"/>
           <p:cNvSpPr/>
           <p:nvPr/>
         </p:nvSpPr>
@@ -10270,7 +11175,7 @@
       </p:sp>
       <p:sp>
         <p:nvSpPr>
-          <p:cNvPr id="13" name="Rounded Rectangle 12"/>
+          <p:cNvPr id="15" name="Rounded Rectangle 14"/>
           <p:cNvSpPr/>
           <p:nvPr/>
         </p:nvSpPr>
@@ -10338,7 +11243,7 @@
       </p:sp>
       <p:sp>
         <p:nvSpPr>
-          <p:cNvPr id="14" name="TextBox 13"/>
+          <p:cNvPr id="16" name="TextBox 15"/>
           <p:cNvSpPr txBox="1"/>
           <p:nvPr/>
         </p:nvSpPr>
@@ -10810,9 +11715,113 @@
           </a:prstGeom>
         </p:spPr>
       </p:pic>
+      <p:sp>
+        <p:nvSpPr>
+          <p:cNvPr id="11" name="Rounded Rectangle 10"/>
+          <p:cNvSpPr/>
+          <p:nvPr/>
+        </p:nvSpPr>
+        <p:spPr>
+          <a:xfrm>
+            <a:off x="411479" y="1444752"/>
+            <a:ext cx="11368735" cy="4800600"/>
+          </a:xfrm>
+          <a:prstGeom prst="roundRect">
+            <a:avLst>
+              <a:gd name="adj" fmla="val 4000"/>
+            </a:avLst>
+          </a:prstGeom>
+          <a:solidFill>
+            <a:srgbClr val="FFFFFF">
+              <a:alpha val="84000"/>
+            </a:srgbClr>
+          </a:solidFill>
+          <a:ln w="19050">
+            <a:solidFill>
+              <a:srgbClr val="FFFFFF"/>
+            </a:solidFill>
+          </a:ln>
+          <a:effectLst>
+            <a:outerShdw blurRad="203200" dist="50800" dir="5400000" algn="t" rotWithShape="0">
+              <a:srgbClr val="1A2340">
+                <a:alpha val="20000"/>
+              </a:srgbClr>
+            </a:outerShdw>
+          </a:effectLst>
+        </p:spPr>
+        <p:style>
+          <a:lnRef idx="1">
+            <a:schemeClr val="accent1"/>
+          </a:lnRef>
+          <a:fillRef idx="3">
+            <a:schemeClr val="accent1"/>
+          </a:fillRef>
+          <a:effectRef idx="2">
+            <a:schemeClr val="accent1"/>
+          </a:effectRef>
+          <a:fontRef idx="minor">
+            <a:schemeClr val="lt1"/>
+          </a:fontRef>
+        </p:style>
+        <p:txBody>
+          <a:bodyPr rtlCol="0" anchor="ctr"/>
+          <a:lstStyle/>
+          <a:p>
+            <a:pPr algn="ctr"/>
+          </a:p>
+        </p:txBody>
+      </p:sp>
+      <p:sp>
+        <p:nvSpPr>
+          <p:cNvPr id="12" name="Rounded Rectangle 11"/>
+          <p:cNvSpPr/>
+          <p:nvPr/>
+        </p:nvSpPr>
+        <p:spPr>
+          <a:xfrm>
+            <a:off x="731519" y="1508760"/>
+            <a:ext cx="10728655" cy="32004"/>
+          </a:xfrm>
+          <a:prstGeom prst="roundRect">
+            <a:avLst>
+              <a:gd name="adj" fmla="val 50000"/>
+            </a:avLst>
+          </a:prstGeom>
+          <a:solidFill>
+            <a:srgbClr val="FFFFFF">
+              <a:alpha val="85000"/>
+            </a:srgbClr>
+          </a:solidFill>
+          <a:ln>
+            <a:noFill/>
+          </a:ln>
+          <a:effectLst/>
+        </p:spPr>
+        <p:style>
+          <a:lnRef idx="1">
+            <a:schemeClr val="accent1"/>
+          </a:lnRef>
+          <a:fillRef idx="3">
+            <a:schemeClr val="accent1"/>
+          </a:fillRef>
+          <a:effectRef idx="2">
+            <a:schemeClr val="accent1"/>
+          </a:effectRef>
+          <a:fontRef idx="minor">
+            <a:schemeClr val="lt1"/>
+          </a:fontRef>
+        </p:style>
+        <p:txBody>
+          <a:bodyPr rtlCol="0" anchor="ctr"/>
+          <a:lstStyle/>
+          <a:p>
+            <a:pPr algn="ctr"/>
+          </a:p>
+        </p:txBody>
+      </p:sp>
       <p:graphicFrame>
         <p:nvGraphicFramePr>
-          <p:cNvPr id="11" name="Table 10"/>
+          <p:cNvPr id="13" name="Table 12"/>
           <p:cNvGraphicFramePr>
             <a:graphicFrameLocks noGrp="1"/>
           </p:cNvGraphicFramePr>
@@ -11764,7 +12773,111 @@
       </p:pic>
       <p:sp>
         <p:nvSpPr>
-          <p:cNvPr id="11" name="Oval 10"/>
+          <p:cNvPr id="11" name="Rounded Rectangle 10"/>
+          <p:cNvSpPr/>
+          <p:nvPr/>
+        </p:nvSpPr>
+        <p:spPr>
+          <a:xfrm>
+            <a:off x="411479" y="1444752"/>
+            <a:ext cx="11368735" cy="4800600"/>
+          </a:xfrm>
+          <a:prstGeom prst="roundRect">
+            <a:avLst>
+              <a:gd name="adj" fmla="val 4000"/>
+            </a:avLst>
+          </a:prstGeom>
+          <a:solidFill>
+            <a:srgbClr val="FFFFFF">
+              <a:alpha val="84000"/>
+            </a:srgbClr>
+          </a:solidFill>
+          <a:ln w="19050">
+            <a:solidFill>
+              <a:srgbClr val="FFFFFF"/>
+            </a:solidFill>
+          </a:ln>
+          <a:effectLst>
+            <a:outerShdw blurRad="203200" dist="50800" dir="5400000" algn="t" rotWithShape="0">
+              <a:srgbClr val="1A2340">
+                <a:alpha val="20000"/>
+              </a:srgbClr>
+            </a:outerShdw>
+          </a:effectLst>
+        </p:spPr>
+        <p:style>
+          <a:lnRef idx="1">
+            <a:schemeClr val="accent1"/>
+          </a:lnRef>
+          <a:fillRef idx="3">
+            <a:schemeClr val="accent1"/>
+          </a:fillRef>
+          <a:effectRef idx="2">
+            <a:schemeClr val="accent1"/>
+          </a:effectRef>
+          <a:fontRef idx="minor">
+            <a:schemeClr val="lt1"/>
+          </a:fontRef>
+        </p:style>
+        <p:txBody>
+          <a:bodyPr rtlCol="0" anchor="ctr"/>
+          <a:lstStyle/>
+          <a:p>
+            <a:pPr algn="ctr"/>
+          </a:p>
+        </p:txBody>
+      </p:sp>
+      <p:sp>
+        <p:nvSpPr>
+          <p:cNvPr id="12" name="Rounded Rectangle 11"/>
+          <p:cNvSpPr/>
+          <p:nvPr/>
+        </p:nvSpPr>
+        <p:spPr>
+          <a:xfrm>
+            <a:off x="731519" y="1508760"/>
+            <a:ext cx="10728655" cy="32004"/>
+          </a:xfrm>
+          <a:prstGeom prst="roundRect">
+            <a:avLst>
+              <a:gd name="adj" fmla="val 50000"/>
+            </a:avLst>
+          </a:prstGeom>
+          <a:solidFill>
+            <a:srgbClr val="FFFFFF">
+              <a:alpha val="85000"/>
+            </a:srgbClr>
+          </a:solidFill>
+          <a:ln>
+            <a:noFill/>
+          </a:ln>
+          <a:effectLst/>
+        </p:spPr>
+        <p:style>
+          <a:lnRef idx="1">
+            <a:schemeClr val="accent1"/>
+          </a:lnRef>
+          <a:fillRef idx="3">
+            <a:schemeClr val="accent1"/>
+          </a:fillRef>
+          <a:effectRef idx="2">
+            <a:schemeClr val="accent1"/>
+          </a:effectRef>
+          <a:fontRef idx="minor">
+            <a:schemeClr val="lt1"/>
+          </a:fontRef>
+        </p:style>
+        <p:txBody>
+          <a:bodyPr rtlCol="0" anchor="ctr"/>
+          <a:lstStyle/>
+          <a:p>
+            <a:pPr algn="ctr"/>
+          </a:p>
+        </p:txBody>
+      </p:sp>
+      <p:sp>
+        <p:nvSpPr>
+          <p:cNvPr id="13" name="Oval 12"/>
           <p:cNvSpPr/>
           <p:nvPr/>
         </p:nvSpPr>
@@ -11817,7 +12930,7 @@
       </p:sp>
       <p:sp>
         <p:nvSpPr>
-          <p:cNvPr id="12" name="TextBox 11"/>
+          <p:cNvPr id="14" name="TextBox 13"/>
           <p:cNvSpPr txBox="1"/>
           <p:nvPr/>
         </p:nvSpPr>
@@ -11851,7 +12964,7 @@
       </p:sp>
       <p:sp>
         <p:nvSpPr>
-          <p:cNvPr id="13" name="Oval 12"/>
+          <p:cNvPr id="15" name="Oval 14"/>
           <p:cNvSpPr/>
           <p:nvPr/>
         </p:nvSpPr>
@@ -11904,7 +13017,7 @@
       </p:sp>
       <p:sp>
         <p:nvSpPr>
-          <p:cNvPr id="14" name="TextBox 13"/>
+          <p:cNvPr id="16" name="TextBox 15"/>
           <p:cNvSpPr txBox="1"/>
           <p:nvPr/>
         </p:nvSpPr>
@@ -11938,7 +13051,7 @@
       </p:sp>
       <p:sp>
         <p:nvSpPr>
-          <p:cNvPr id="15" name="Oval 14"/>
+          <p:cNvPr id="17" name="Oval 16"/>
           <p:cNvSpPr/>
           <p:nvPr/>
         </p:nvSpPr>
@@ -11991,7 +13104,7 @@
       </p:sp>
       <p:sp>
         <p:nvSpPr>
-          <p:cNvPr id="16" name="TextBox 15"/>
+          <p:cNvPr id="18" name="TextBox 17"/>
           <p:cNvSpPr txBox="1"/>
           <p:nvPr/>
         </p:nvSpPr>
@@ -12406,7 +13519,111 @@
       </p:pic>
       <p:sp>
         <p:nvSpPr>
-          <p:cNvPr id="11" name="TextBox 10"/>
+          <p:cNvPr id="11" name="Rounded Rectangle 10"/>
+          <p:cNvSpPr/>
+          <p:nvPr/>
+        </p:nvSpPr>
+        <p:spPr>
+          <a:xfrm>
+            <a:off x="411479" y="1444752"/>
+            <a:ext cx="11368735" cy="4800600"/>
+          </a:xfrm>
+          <a:prstGeom prst="roundRect">
+            <a:avLst>
+              <a:gd name="adj" fmla="val 4000"/>
+            </a:avLst>
+          </a:prstGeom>
+          <a:solidFill>
+            <a:srgbClr val="FFFFFF">
+              <a:alpha val="84000"/>
+            </a:srgbClr>
+          </a:solidFill>
+          <a:ln w="19050">
+            <a:solidFill>
+              <a:srgbClr val="FFFFFF"/>
+            </a:solidFill>
+          </a:ln>
+          <a:effectLst>
+            <a:outerShdw blurRad="203200" dist="50800" dir="5400000" algn="t" rotWithShape="0">
+              <a:srgbClr val="1A2340">
+                <a:alpha val="20000"/>
+              </a:srgbClr>
+            </a:outerShdw>
+          </a:effectLst>
+        </p:spPr>
+        <p:style>
+          <a:lnRef idx="1">
+            <a:schemeClr val="accent1"/>
+          </a:lnRef>
+          <a:fillRef idx="3">
+            <a:schemeClr val="accent1"/>
+          </a:fillRef>
+          <a:effectRef idx="2">
+            <a:schemeClr val="accent1"/>
+          </a:effectRef>
+          <a:fontRef idx="minor">
+            <a:schemeClr val="lt1"/>
+          </a:fontRef>
+        </p:style>
+        <p:txBody>
+          <a:bodyPr rtlCol="0" anchor="ctr"/>
+          <a:lstStyle/>
+          <a:p>
+            <a:pPr algn="ctr"/>
+          </a:p>
+        </p:txBody>
+      </p:sp>
+      <p:sp>
+        <p:nvSpPr>
+          <p:cNvPr id="12" name="Rounded Rectangle 11"/>
+          <p:cNvSpPr/>
+          <p:nvPr/>
+        </p:nvSpPr>
+        <p:spPr>
+          <a:xfrm>
+            <a:off x="731519" y="1508760"/>
+            <a:ext cx="10728655" cy="32004"/>
+          </a:xfrm>
+          <a:prstGeom prst="roundRect">
+            <a:avLst>
+              <a:gd name="adj" fmla="val 50000"/>
+            </a:avLst>
+          </a:prstGeom>
+          <a:solidFill>
+            <a:srgbClr val="FFFFFF">
+              <a:alpha val="85000"/>
+            </a:srgbClr>
+          </a:solidFill>
+          <a:ln>
+            <a:noFill/>
+          </a:ln>
+          <a:effectLst/>
+        </p:spPr>
+        <p:style>
+          <a:lnRef idx="1">
+            <a:schemeClr val="accent1"/>
+          </a:lnRef>
+          <a:fillRef idx="3">
+            <a:schemeClr val="accent1"/>
+          </a:fillRef>
+          <a:effectRef idx="2">
+            <a:schemeClr val="accent1"/>
+          </a:effectRef>
+          <a:fontRef idx="minor">
+            <a:schemeClr val="lt1"/>
+          </a:fontRef>
+        </p:style>
+        <p:txBody>
+          <a:bodyPr rtlCol="0" anchor="ctr"/>
+          <a:lstStyle/>
+          <a:p>
+            <a:pPr algn="ctr"/>
+          </a:p>
+        </p:txBody>
+      </p:sp>
+      <p:sp>
+        <p:nvSpPr>
+          <p:cNvPr id="13" name="TextBox 12"/>
           <p:cNvSpPr txBox="1"/>
           <p:nvPr/>
         </p:nvSpPr>
@@ -12440,7 +13657,7 @@
       </p:sp>
       <p:sp>
         <p:nvSpPr>
-          <p:cNvPr id="12" name="Rounded Rectangle 11"/>
+          <p:cNvPr id="14" name="Rounded Rectangle 13"/>
           <p:cNvSpPr/>
           <p:nvPr/>
         </p:nvSpPr>
@@ -12496,7 +13713,7 @@
       </p:sp>
       <p:sp>
         <p:nvSpPr>
-          <p:cNvPr id="13" name="Oval 12"/>
+          <p:cNvPr id="15" name="Oval 14"/>
           <p:cNvSpPr/>
           <p:nvPr/>
         </p:nvSpPr>
@@ -12549,7 +13766,7 @@
       </p:sp>
       <p:sp>
         <p:nvSpPr>
-          <p:cNvPr id="14" name="TextBox 13"/>
+          <p:cNvPr id="16" name="TextBox 15"/>
           <p:cNvSpPr txBox="1"/>
           <p:nvPr/>
         </p:nvSpPr>
@@ -12583,7 +13800,7 @@
       </p:sp>
       <p:sp>
         <p:nvSpPr>
-          <p:cNvPr id="15" name="Rounded Rectangle 14"/>
+          <p:cNvPr id="17" name="Rounded Rectangle 16"/>
           <p:cNvSpPr/>
           <p:nvPr/>
         </p:nvSpPr>
@@ -12639,7 +13856,7 @@
       </p:sp>
       <p:sp>
         <p:nvSpPr>
-          <p:cNvPr id="16" name="Oval 15"/>
+          <p:cNvPr id="18" name="Oval 17"/>
           <p:cNvSpPr/>
           <p:nvPr/>
         </p:nvSpPr>
@@ -12692,7 +13909,7 @@
       </p:sp>
       <p:sp>
         <p:nvSpPr>
-          <p:cNvPr id="17" name="TextBox 16"/>
+          <p:cNvPr id="19" name="TextBox 18"/>
           <p:cNvSpPr txBox="1"/>
           <p:nvPr/>
         </p:nvSpPr>
@@ -12726,7 +13943,7 @@
       </p:sp>
       <p:sp>
         <p:nvSpPr>
-          <p:cNvPr id="18" name="Rounded Rectangle 17"/>
+          <p:cNvPr id="20" name="Rounded Rectangle 19"/>
           <p:cNvSpPr/>
           <p:nvPr/>
         </p:nvSpPr>
@@ -12782,7 +13999,7 @@
       </p:sp>
       <p:sp>
         <p:nvSpPr>
-          <p:cNvPr id="19" name="Oval 18"/>
+          <p:cNvPr id="21" name="Oval 20"/>
           <p:cNvSpPr/>
           <p:nvPr/>
         </p:nvSpPr>
@@ -12835,7 +14052,7 @@
       </p:sp>
       <p:sp>
         <p:nvSpPr>
-          <p:cNvPr id="20" name="TextBox 19"/>
+          <p:cNvPr id="22" name="TextBox 21"/>
           <p:cNvSpPr txBox="1"/>
           <p:nvPr/>
         </p:nvSpPr>
@@ -12869,7 +14086,7 @@
       </p:sp>
       <p:sp>
         <p:nvSpPr>
-          <p:cNvPr id="21" name="Rounded Rectangle 20"/>
+          <p:cNvPr id="23" name="Rounded Rectangle 22"/>
           <p:cNvSpPr/>
           <p:nvPr/>
         </p:nvSpPr>
@@ -12925,7 +14142,7 @@
       </p:sp>
       <p:sp>
         <p:nvSpPr>
-          <p:cNvPr id="22" name="Oval 21"/>
+          <p:cNvPr id="24" name="Oval 23"/>
           <p:cNvSpPr/>
           <p:nvPr/>
         </p:nvSpPr>
@@ -12978,7 +14195,7 @@
       </p:sp>
       <p:sp>
         <p:nvSpPr>
-          <p:cNvPr id="23" name="TextBox 22"/>
+          <p:cNvPr id="25" name="TextBox 24"/>
           <p:cNvSpPr txBox="1"/>
           <p:nvPr/>
         </p:nvSpPr>
@@ -13393,7 +14610,111 @@
       </p:pic>
       <p:sp>
         <p:nvSpPr>
-          <p:cNvPr id="11" name="Oval 10"/>
+          <p:cNvPr id="11" name="Rounded Rectangle 10"/>
+          <p:cNvSpPr/>
+          <p:nvPr/>
+        </p:nvSpPr>
+        <p:spPr>
+          <a:xfrm>
+            <a:off x="411479" y="1444752"/>
+            <a:ext cx="11368735" cy="4800600"/>
+          </a:xfrm>
+          <a:prstGeom prst="roundRect">
+            <a:avLst>
+              <a:gd name="adj" fmla="val 4000"/>
+            </a:avLst>
+          </a:prstGeom>
+          <a:solidFill>
+            <a:srgbClr val="FFFFFF">
+              <a:alpha val="84000"/>
+            </a:srgbClr>
+          </a:solidFill>
+          <a:ln w="19050">
+            <a:solidFill>
+              <a:srgbClr val="FFFFFF"/>
+            </a:solidFill>
+          </a:ln>
+          <a:effectLst>
+            <a:outerShdw blurRad="203200" dist="50800" dir="5400000" algn="t" rotWithShape="0">
+              <a:srgbClr val="1A2340">
+                <a:alpha val="20000"/>
+              </a:srgbClr>
+            </a:outerShdw>
+          </a:effectLst>
+        </p:spPr>
+        <p:style>
+          <a:lnRef idx="1">
+            <a:schemeClr val="accent1"/>
+          </a:lnRef>
+          <a:fillRef idx="3">
+            <a:schemeClr val="accent1"/>
+          </a:fillRef>
+          <a:effectRef idx="2">
+            <a:schemeClr val="accent1"/>
+          </a:effectRef>
+          <a:fontRef idx="minor">
+            <a:schemeClr val="lt1"/>
+          </a:fontRef>
+        </p:style>
+        <p:txBody>
+          <a:bodyPr rtlCol="0" anchor="ctr"/>
+          <a:lstStyle/>
+          <a:p>
+            <a:pPr algn="ctr"/>
+          </a:p>
+        </p:txBody>
+      </p:sp>
+      <p:sp>
+        <p:nvSpPr>
+          <p:cNvPr id="12" name="Rounded Rectangle 11"/>
+          <p:cNvSpPr/>
+          <p:nvPr/>
+        </p:nvSpPr>
+        <p:spPr>
+          <a:xfrm>
+            <a:off x="731519" y="1508760"/>
+            <a:ext cx="10728655" cy="32004"/>
+          </a:xfrm>
+          <a:prstGeom prst="roundRect">
+            <a:avLst>
+              <a:gd name="adj" fmla="val 50000"/>
+            </a:avLst>
+          </a:prstGeom>
+          <a:solidFill>
+            <a:srgbClr val="FFFFFF">
+              <a:alpha val="85000"/>
+            </a:srgbClr>
+          </a:solidFill>
+          <a:ln>
+            <a:noFill/>
+          </a:ln>
+          <a:effectLst/>
+        </p:spPr>
+        <p:style>
+          <a:lnRef idx="1">
+            <a:schemeClr val="accent1"/>
+          </a:lnRef>
+          <a:fillRef idx="3">
+            <a:schemeClr val="accent1"/>
+          </a:fillRef>
+          <a:effectRef idx="2">
+            <a:schemeClr val="accent1"/>
+          </a:effectRef>
+          <a:fontRef idx="minor">
+            <a:schemeClr val="lt1"/>
+          </a:fontRef>
+        </p:style>
+        <p:txBody>
+          <a:bodyPr rtlCol="0" anchor="ctr"/>
+          <a:lstStyle/>
+          <a:p>
+            <a:pPr algn="ctr"/>
+          </a:p>
+        </p:txBody>
+      </p:sp>
+      <p:sp>
+        <p:nvSpPr>
+          <p:cNvPr id="13" name="Oval 12"/>
           <p:cNvSpPr/>
           <p:nvPr/>
         </p:nvSpPr>
@@ -13446,7 +14767,7 @@
       </p:sp>
       <p:sp>
         <p:nvSpPr>
-          <p:cNvPr id="12" name="TextBox 11"/>
+          <p:cNvPr id="14" name="TextBox 13"/>
           <p:cNvSpPr txBox="1"/>
           <p:nvPr/>
         </p:nvSpPr>
@@ -13480,7 +14801,7 @@
       </p:sp>
       <p:sp>
         <p:nvSpPr>
-          <p:cNvPr id="13" name="Oval 12"/>
+          <p:cNvPr id="15" name="Oval 14"/>
           <p:cNvSpPr/>
           <p:nvPr/>
         </p:nvSpPr>
@@ -13533,7 +14854,7 @@
       </p:sp>
       <p:sp>
         <p:nvSpPr>
-          <p:cNvPr id="14" name="TextBox 13"/>
+          <p:cNvPr id="16" name="TextBox 15"/>
           <p:cNvSpPr txBox="1"/>
           <p:nvPr/>
         </p:nvSpPr>
@@ -13567,7 +14888,7 @@
       </p:sp>
       <p:sp>
         <p:nvSpPr>
-          <p:cNvPr id="15" name="Oval 14"/>
+          <p:cNvPr id="17" name="Oval 16"/>
           <p:cNvSpPr/>
           <p:nvPr/>
         </p:nvSpPr>
@@ -13620,7 +14941,7 @@
       </p:sp>
       <p:sp>
         <p:nvSpPr>
-          <p:cNvPr id="16" name="TextBox 15"/>
+          <p:cNvPr id="18" name="TextBox 17"/>
           <p:cNvSpPr txBox="1"/>
           <p:nvPr/>
         </p:nvSpPr>
@@ -13654,7 +14975,7 @@
       </p:sp>
       <p:sp>
         <p:nvSpPr>
-          <p:cNvPr id="17" name="Oval 16"/>
+          <p:cNvPr id="19" name="Oval 18"/>
           <p:cNvSpPr/>
           <p:nvPr/>
         </p:nvSpPr>
@@ -13707,7 +15028,7 @@
       </p:sp>
       <p:sp>
         <p:nvSpPr>
-          <p:cNvPr id="18" name="TextBox 17"/>
+          <p:cNvPr id="20" name="TextBox 19"/>
           <p:cNvSpPr txBox="1"/>
           <p:nvPr/>
         </p:nvSpPr>
@@ -13741,7 +15062,7 @@
       </p:sp>
       <p:sp>
         <p:nvSpPr>
-          <p:cNvPr id="19" name="Oval 18"/>
+          <p:cNvPr id="21" name="Oval 20"/>
           <p:cNvSpPr/>
           <p:nvPr/>
         </p:nvSpPr>
@@ -13794,7 +15115,7 @@
       </p:sp>
       <p:sp>
         <p:nvSpPr>
-          <p:cNvPr id="20" name="TextBox 19"/>
+          <p:cNvPr id="22" name="TextBox 21"/>
           <p:cNvSpPr txBox="1"/>
           <p:nvPr/>
         </p:nvSpPr>
@@ -13828,7 +15149,7 @@
       </p:sp>
       <p:sp>
         <p:nvSpPr>
-          <p:cNvPr id="21" name="Rounded Rectangle 20"/>
+          <p:cNvPr id="23" name="Rounded Rectangle 22"/>
           <p:cNvSpPr/>
           <p:nvPr/>
         </p:nvSpPr>
@@ -13884,7 +15205,7 @@
       </p:sp>
       <p:sp>
         <p:nvSpPr>
-          <p:cNvPr id="22" name="Rounded Rectangle 21"/>
+          <p:cNvPr id="24" name="Rounded Rectangle 23"/>
           <p:cNvSpPr/>
           <p:nvPr/>
         </p:nvSpPr>
@@ -13932,7 +15253,7 @@
       </p:sp>
       <p:sp>
         <p:nvSpPr>
-          <p:cNvPr id="23" name="TextBox 22"/>
+          <p:cNvPr id="25" name="TextBox 24"/>
           <p:cNvSpPr txBox="1"/>
           <p:nvPr/>
         </p:nvSpPr>
@@ -14390,7 +15711,111 @@
       </p:pic>
       <p:sp>
         <p:nvSpPr>
-          <p:cNvPr id="11" name="TextBox 10"/>
+          <p:cNvPr id="11" name="Rounded Rectangle 10"/>
+          <p:cNvSpPr/>
+          <p:nvPr/>
+        </p:nvSpPr>
+        <p:spPr>
+          <a:xfrm>
+            <a:off x="411479" y="1444752"/>
+            <a:ext cx="11368735" cy="4800600"/>
+          </a:xfrm>
+          <a:prstGeom prst="roundRect">
+            <a:avLst>
+              <a:gd name="adj" fmla="val 4000"/>
+            </a:avLst>
+          </a:prstGeom>
+          <a:solidFill>
+            <a:srgbClr val="FFFFFF">
+              <a:alpha val="84000"/>
+            </a:srgbClr>
+          </a:solidFill>
+          <a:ln w="19050">
+            <a:solidFill>
+              <a:srgbClr val="FFFFFF"/>
+            </a:solidFill>
+          </a:ln>
+          <a:effectLst>
+            <a:outerShdw blurRad="203200" dist="50800" dir="5400000" algn="t" rotWithShape="0">
+              <a:srgbClr val="1A2340">
+                <a:alpha val="20000"/>
+              </a:srgbClr>
+            </a:outerShdw>
+          </a:effectLst>
+        </p:spPr>
+        <p:style>
+          <a:lnRef idx="1">
+            <a:schemeClr val="accent1"/>
+          </a:lnRef>
+          <a:fillRef idx="3">
+            <a:schemeClr val="accent1"/>
+          </a:fillRef>
+          <a:effectRef idx="2">
+            <a:schemeClr val="accent1"/>
+          </a:effectRef>
+          <a:fontRef idx="minor">
+            <a:schemeClr val="lt1"/>
+          </a:fontRef>
+        </p:style>
+        <p:txBody>
+          <a:bodyPr rtlCol="0" anchor="ctr"/>
+          <a:lstStyle/>
+          <a:p>
+            <a:pPr algn="ctr"/>
+          </a:p>
+        </p:txBody>
+      </p:sp>
+      <p:sp>
+        <p:nvSpPr>
+          <p:cNvPr id="12" name="Rounded Rectangle 11"/>
+          <p:cNvSpPr/>
+          <p:nvPr/>
+        </p:nvSpPr>
+        <p:spPr>
+          <a:xfrm>
+            <a:off x="731519" y="1508760"/>
+            <a:ext cx="10728655" cy="32004"/>
+          </a:xfrm>
+          <a:prstGeom prst="roundRect">
+            <a:avLst>
+              <a:gd name="adj" fmla="val 50000"/>
+            </a:avLst>
+          </a:prstGeom>
+          <a:solidFill>
+            <a:srgbClr val="FFFFFF">
+              <a:alpha val="85000"/>
+            </a:srgbClr>
+          </a:solidFill>
+          <a:ln>
+            <a:noFill/>
+          </a:ln>
+          <a:effectLst/>
+        </p:spPr>
+        <p:style>
+          <a:lnRef idx="1">
+            <a:schemeClr val="accent1"/>
+          </a:lnRef>
+          <a:fillRef idx="3">
+            <a:schemeClr val="accent1"/>
+          </a:fillRef>
+          <a:effectRef idx="2">
+            <a:schemeClr val="accent1"/>
+          </a:effectRef>
+          <a:fontRef idx="minor">
+            <a:schemeClr val="lt1"/>
+          </a:fontRef>
+        </p:style>
+        <p:txBody>
+          <a:bodyPr rtlCol="0" anchor="ctr"/>
+          <a:lstStyle/>
+          <a:p>
+            <a:pPr algn="ctr"/>
+          </a:p>
+        </p:txBody>
+      </p:sp>
+      <p:sp>
+        <p:nvSpPr>
+          <p:cNvPr id="13" name="TextBox 12"/>
           <p:cNvSpPr txBox="1"/>
           <p:nvPr/>
         </p:nvSpPr>
@@ -14424,7 +15849,7 @@
       </p:sp>
       <p:sp>
         <p:nvSpPr>
-          <p:cNvPr id="12" name="Rounded Rectangle 11"/>
+          <p:cNvPr id="14" name="Rounded Rectangle 13"/>
           <p:cNvSpPr/>
           <p:nvPr/>
         </p:nvSpPr>
@@ -14480,7 +15905,7 @@
       </p:sp>
       <p:sp>
         <p:nvSpPr>
-          <p:cNvPr id="13" name="Oval 12"/>
+          <p:cNvPr id="15" name="Oval 14"/>
           <p:cNvSpPr/>
           <p:nvPr/>
         </p:nvSpPr>
@@ -14533,7 +15958,7 @@
       </p:sp>
       <p:sp>
         <p:nvSpPr>
-          <p:cNvPr id="14" name="TextBox 13"/>
+          <p:cNvPr id="16" name="TextBox 15"/>
           <p:cNvSpPr txBox="1"/>
           <p:nvPr/>
         </p:nvSpPr>
@@ -14567,7 +15992,7 @@
       </p:sp>
       <p:sp>
         <p:nvSpPr>
-          <p:cNvPr id="15" name="Rounded Rectangle 14"/>
+          <p:cNvPr id="17" name="Rounded Rectangle 16"/>
           <p:cNvSpPr/>
           <p:nvPr/>
         </p:nvSpPr>
@@ -14626,7 +16051,7 @@
       </p:sp>
       <p:sp>
         <p:nvSpPr>
-          <p:cNvPr id="16" name="Oval 15"/>
+          <p:cNvPr id="18" name="Oval 17"/>
           <p:cNvSpPr/>
           <p:nvPr/>
         </p:nvSpPr>
@@ -14679,7 +16104,7 @@
       </p:sp>
       <p:sp>
         <p:nvSpPr>
-          <p:cNvPr id="17" name="TextBox 16"/>
+          <p:cNvPr id="19" name="TextBox 18"/>
           <p:cNvSpPr txBox="1"/>
           <p:nvPr/>
         </p:nvSpPr>
@@ -14713,7 +16138,7 @@
       </p:sp>
       <p:sp>
         <p:nvSpPr>
-          <p:cNvPr id="18" name="Rounded Rectangle 17"/>
+          <p:cNvPr id="20" name="Rounded Rectangle 19"/>
           <p:cNvSpPr/>
           <p:nvPr/>
         </p:nvSpPr>
@@ -14769,7 +16194,7 @@
       </p:sp>
       <p:sp>
         <p:nvSpPr>
-          <p:cNvPr id="19" name="Oval 18"/>
+          <p:cNvPr id="21" name="Oval 20"/>
           <p:cNvSpPr/>
           <p:nvPr/>
         </p:nvSpPr>
@@ -14822,7 +16247,7 @@
       </p:sp>
       <p:sp>
         <p:nvSpPr>
-          <p:cNvPr id="20" name="TextBox 19"/>
+          <p:cNvPr id="22" name="TextBox 21"/>
           <p:cNvSpPr txBox="1"/>
           <p:nvPr/>
         </p:nvSpPr>
@@ -14856,7 +16281,7 @@
       </p:sp>
       <p:sp>
         <p:nvSpPr>
-          <p:cNvPr id="21" name="Rounded Rectangle 20"/>
+          <p:cNvPr id="23" name="Rounded Rectangle 22"/>
           <p:cNvSpPr/>
           <p:nvPr/>
         </p:nvSpPr>
@@ -14912,7 +16337,7 @@
       </p:sp>
       <p:sp>
         <p:nvSpPr>
-          <p:cNvPr id="22" name="Oval 21"/>
+          <p:cNvPr id="24" name="Oval 23"/>
           <p:cNvSpPr/>
           <p:nvPr/>
         </p:nvSpPr>
@@ -14965,7 +16390,7 @@
       </p:sp>
       <p:sp>
         <p:nvSpPr>
-          <p:cNvPr id="23" name="TextBox 22"/>
+          <p:cNvPr id="25" name="TextBox 24"/>
           <p:cNvSpPr txBox="1"/>
           <p:nvPr/>
         </p:nvSpPr>
@@ -14999,7 +16424,7 @@
       </p:sp>
       <p:sp>
         <p:nvSpPr>
-          <p:cNvPr id="24" name="TextBox 23"/>
+          <p:cNvPr id="26" name="TextBox 25"/>
           <p:cNvSpPr txBox="1"/>
           <p:nvPr/>
         </p:nvSpPr>
@@ -15423,7 +16848,111 @@
       </p:pic>
       <p:sp>
         <p:nvSpPr>
-          <p:cNvPr id="11" name="TextBox 10"/>
+          <p:cNvPr id="11" name="Rounded Rectangle 10"/>
+          <p:cNvSpPr/>
+          <p:nvPr/>
+        </p:nvSpPr>
+        <p:spPr>
+          <a:xfrm>
+            <a:off x="411479" y="1444752"/>
+            <a:ext cx="11368735" cy="4800600"/>
+          </a:xfrm>
+          <a:prstGeom prst="roundRect">
+            <a:avLst>
+              <a:gd name="adj" fmla="val 4000"/>
+            </a:avLst>
+          </a:prstGeom>
+          <a:solidFill>
+            <a:srgbClr val="FFFFFF">
+              <a:alpha val="84000"/>
+            </a:srgbClr>
+          </a:solidFill>
+          <a:ln w="19050">
+            <a:solidFill>
+              <a:srgbClr val="FFFFFF"/>
+            </a:solidFill>
+          </a:ln>
+          <a:effectLst>
+            <a:outerShdw blurRad="203200" dist="50800" dir="5400000" algn="t" rotWithShape="0">
+              <a:srgbClr val="1A2340">
+                <a:alpha val="20000"/>
+              </a:srgbClr>
+            </a:outerShdw>
+          </a:effectLst>
+        </p:spPr>
+        <p:style>
+          <a:lnRef idx="1">
+            <a:schemeClr val="accent1"/>
+          </a:lnRef>
+          <a:fillRef idx="3">
+            <a:schemeClr val="accent1"/>
+          </a:fillRef>
+          <a:effectRef idx="2">
+            <a:schemeClr val="accent1"/>
+          </a:effectRef>
+          <a:fontRef idx="minor">
+            <a:schemeClr val="lt1"/>
+          </a:fontRef>
+        </p:style>
+        <p:txBody>
+          <a:bodyPr rtlCol="0" anchor="ctr"/>
+          <a:lstStyle/>
+          <a:p>
+            <a:pPr algn="ctr"/>
+          </a:p>
+        </p:txBody>
+      </p:sp>
+      <p:sp>
+        <p:nvSpPr>
+          <p:cNvPr id="12" name="Rounded Rectangle 11"/>
+          <p:cNvSpPr/>
+          <p:nvPr/>
+        </p:nvSpPr>
+        <p:spPr>
+          <a:xfrm>
+            <a:off x="731519" y="1508760"/>
+            <a:ext cx="10728655" cy="32004"/>
+          </a:xfrm>
+          <a:prstGeom prst="roundRect">
+            <a:avLst>
+              <a:gd name="adj" fmla="val 50000"/>
+            </a:avLst>
+          </a:prstGeom>
+          <a:solidFill>
+            <a:srgbClr val="FFFFFF">
+              <a:alpha val="85000"/>
+            </a:srgbClr>
+          </a:solidFill>
+          <a:ln>
+            <a:noFill/>
+          </a:ln>
+          <a:effectLst/>
+        </p:spPr>
+        <p:style>
+          <a:lnRef idx="1">
+            <a:schemeClr val="accent1"/>
+          </a:lnRef>
+          <a:fillRef idx="3">
+            <a:schemeClr val="accent1"/>
+          </a:fillRef>
+          <a:effectRef idx="2">
+            <a:schemeClr val="accent1"/>
+          </a:effectRef>
+          <a:fontRef idx="minor">
+            <a:schemeClr val="lt1"/>
+          </a:fontRef>
+        </p:style>
+        <p:txBody>
+          <a:bodyPr rtlCol="0" anchor="ctr"/>
+          <a:lstStyle/>
+          <a:p>
+            <a:pPr algn="ctr"/>
+          </a:p>
+        </p:txBody>
+      </p:sp>
+      <p:sp>
+        <p:nvSpPr>
+          <p:cNvPr id="13" name="TextBox 12"/>
           <p:cNvSpPr txBox="1"/>
           <p:nvPr/>
         </p:nvSpPr>
@@ -15457,7 +16986,7 @@
       </p:sp>
       <p:sp>
         <p:nvSpPr>
-          <p:cNvPr id="12" name="Rounded Rectangle 11"/>
+          <p:cNvPr id="14" name="Rounded Rectangle 13"/>
           <p:cNvSpPr/>
           <p:nvPr/>
         </p:nvSpPr>
@@ -15513,7 +17042,7 @@
       </p:sp>
       <p:sp>
         <p:nvSpPr>
-          <p:cNvPr id="13" name="Oval 12"/>
+          <p:cNvPr id="15" name="Oval 14"/>
           <p:cNvSpPr/>
           <p:nvPr/>
         </p:nvSpPr>
@@ -15566,7 +17095,7 @@
       </p:sp>
       <p:sp>
         <p:nvSpPr>
-          <p:cNvPr id="14" name="TextBox 13"/>
+          <p:cNvPr id="16" name="TextBox 15"/>
           <p:cNvSpPr txBox="1"/>
           <p:nvPr/>
         </p:nvSpPr>
@@ -15600,7 +17129,7 @@
       </p:sp>
       <p:sp>
         <p:nvSpPr>
-          <p:cNvPr id="15" name="Rounded Rectangle 14"/>
+          <p:cNvPr id="17" name="Rounded Rectangle 16"/>
           <p:cNvSpPr/>
           <p:nvPr/>
         </p:nvSpPr>
@@ -15656,7 +17185,7 @@
       </p:sp>
       <p:sp>
         <p:nvSpPr>
-          <p:cNvPr id="16" name="Oval 15"/>
+          <p:cNvPr id="18" name="Oval 17"/>
           <p:cNvSpPr/>
           <p:nvPr/>
         </p:nvSpPr>
@@ -15709,7 +17238,7 @@
       </p:sp>
       <p:sp>
         <p:nvSpPr>
-          <p:cNvPr id="17" name="TextBox 16"/>
+          <p:cNvPr id="19" name="TextBox 18"/>
           <p:cNvSpPr txBox="1"/>
           <p:nvPr/>
         </p:nvSpPr>
@@ -15743,7 +17272,7 @@
       </p:sp>
       <p:sp>
         <p:nvSpPr>
-          <p:cNvPr id="18" name="Rounded Rectangle 17"/>
+          <p:cNvPr id="20" name="Rounded Rectangle 19"/>
           <p:cNvSpPr/>
           <p:nvPr/>
         </p:nvSpPr>
@@ -15799,7 +17328,7 @@
       </p:sp>
       <p:sp>
         <p:nvSpPr>
-          <p:cNvPr id="19" name="Oval 18"/>
+          <p:cNvPr id="21" name="Oval 20"/>
           <p:cNvSpPr/>
           <p:nvPr/>
         </p:nvSpPr>
@@ -15852,7 +17381,7 @@
       </p:sp>
       <p:sp>
         <p:nvSpPr>
-          <p:cNvPr id="20" name="TextBox 19"/>
+          <p:cNvPr id="22" name="TextBox 21"/>
           <p:cNvSpPr txBox="1"/>
           <p:nvPr/>
         </p:nvSpPr>
@@ -15886,7 +17415,7 @@
       </p:sp>
       <p:sp>
         <p:nvSpPr>
-          <p:cNvPr id="21" name="Rounded Rectangle 20"/>
+          <p:cNvPr id="23" name="Rounded Rectangle 22"/>
           <p:cNvSpPr/>
           <p:nvPr/>
         </p:nvSpPr>
@@ -15942,7 +17471,7 @@
       </p:sp>
       <p:sp>
         <p:nvSpPr>
-          <p:cNvPr id="22" name="Oval 21"/>
+          <p:cNvPr id="24" name="Oval 23"/>
           <p:cNvSpPr/>
           <p:nvPr/>
         </p:nvSpPr>
@@ -15995,7 +17524,7 @@
       </p:sp>
       <p:sp>
         <p:nvSpPr>
-          <p:cNvPr id="23" name="TextBox 22"/>
+          <p:cNvPr id="25" name="TextBox 24"/>
           <p:cNvSpPr txBox="1"/>
           <p:nvPr/>
         </p:nvSpPr>
@@ -16410,7 +17939,111 @@
       </p:pic>
       <p:sp>
         <p:nvSpPr>
-          <p:cNvPr id="11" name="TextBox 10"/>
+          <p:cNvPr id="11" name="Rounded Rectangle 10"/>
+          <p:cNvSpPr/>
+          <p:nvPr/>
+        </p:nvSpPr>
+        <p:spPr>
+          <a:xfrm>
+            <a:off x="411479" y="1444752"/>
+            <a:ext cx="11368735" cy="4800600"/>
+          </a:xfrm>
+          <a:prstGeom prst="roundRect">
+            <a:avLst>
+              <a:gd name="adj" fmla="val 4000"/>
+            </a:avLst>
+          </a:prstGeom>
+          <a:solidFill>
+            <a:srgbClr val="FFFFFF">
+              <a:alpha val="84000"/>
+            </a:srgbClr>
+          </a:solidFill>
+          <a:ln w="19050">
+            <a:solidFill>
+              <a:srgbClr val="FFFFFF"/>
+            </a:solidFill>
+          </a:ln>
+          <a:effectLst>
+            <a:outerShdw blurRad="203200" dist="50800" dir="5400000" algn="t" rotWithShape="0">
+              <a:srgbClr val="1A2340">
+                <a:alpha val="20000"/>
+              </a:srgbClr>
+            </a:outerShdw>
+          </a:effectLst>
+        </p:spPr>
+        <p:style>
+          <a:lnRef idx="1">
+            <a:schemeClr val="accent1"/>
+          </a:lnRef>
+          <a:fillRef idx="3">
+            <a:schemeClr val="accent1"/>
+          </a:fillRef>
+          <a:effectRef idx="2">
+            <a:schemeClr val="accent1"/>
+          </a:effectRef>
+          <a:fontRef idx="minor">
+            <a:schemeClr val="lt1"/>
+          </a:fontRef>
+        </p:style>
+        <p:txBody>
+          <a:bodyPr rtlCol="0" anchor="ctr"/>
+          <a:lstStyle/>
+          <a:p>
+            <a:pPr algn="ctr"/>
+          </a:p>
+        </p:txBody>
+      </p:sp>
+      <p:sp>
+        <p:nvSpPr>
+          <p:cNvPr id="12" name="Rounded Rectangle 11"/>
+          <p:cNvSpPr/>
+          <p:nvPr/>
+        </p:nvSpPr>
+        <p:spPr>
+          <a:xfrm>
+            <a:off x="731519" y="1508760"/>
+            <a:ext cx="10728655" cy="32004"/>
+          </a:xfrm>
+          <a:prstGeom prst="roundRect">
+            <a:avLst>
+              <a:gd name="adj" fmla="val 50000"/>
+            </a:avLst>
+          </a:prstGeom>
+          <a:solidFill>
+            <a:srgbClr val="FFFFFF">
+              <a:alpha val="85000"/>
+            </a:srgbClr>
+          </a:solidFill>
+          <a:ln>
+            <a:noFill/>
+          </a:ln>
+          <a:effectLst/>
+        </p:spPr>
+        <p:style>
+          <a:lnRef idx="1">
+            <a:schemeClr val="accent1"/>
+          </a:lnRef>
+          <a:fillRef idx="3">
+            <a:schemeClr val="accent1"/>
+          </a:fillRef>
+          <a:effectRef idx="2">
+            <a:schemeClr val="accent1"/>
+          </a:effectRef>
+          <a:fontRef idx="minor">
+            <a:schemeClr val="lt1"/>
+          </a:fontRef>
+        </p:style>
+        <p:txBody>
+          <a:bodyPr rtlCol="0" anchor="ctr"/>
+          <a:lstStyle/>
+          <a:p>
+            <a:pPr algn="ctr"/>
+          </a:p>
+        </p:txBody>
+      </p:sp>
+      <p:sp>
+        <p:nvSpPr>
+          <p:cNvPr id="13" name="TextBox 12"/>
           <p:cNvSpPr txBox="1"/>
           <p:nvPr/>
         </p:nvSpPr>
@@ -16444,7 +18077,7 @@
       </p:sp>
       <p:sp>
         <p:nvSpPr>
-          <p:cNvPr id="12" name="Rounded Rectangle 11"/>
+          <p:cNvPr id="14" name="Rounded Rectangle 13"/>
           <p:cNvSpPr/>
           <p:nvPr/>
         </p:nvSpPr>
@@ -16500,7 +18133,7 @@
       </p:sp>
       <p:sp>
         <p:nvSpPr>
-          <p:cNvPr id="13" name="Oval 12"/>
+          <p:cNvPr id="15" name="Oval 14"/>
           <p:cNvSpPr/>
           <p:nvPr/>
         </p:nvSpPr>
@@ -16553,7 +18186,7 @@
       </p:sp>
       <p:sp>
         <p:nvSpPr>
-          <p:cNvPr id="14" name="TextBox 13"/>
+          <p:cNvPr id="16" name="TextBox 15"/>
           <p:cNvSpPr txBox="1"/>
           <p:nvPr/>
         </p:nvSpPr>
@@ -16587,7 +18220,7 @@
       </p:sp>
       <p:sp>
         <p:nvSpPr>
-          <p:cNvPr id="15" name="Rounded Rectangle 14"/>
+          <p:cNvPr id="17" name="Rounded Rectangle 16"/>
           <p:cNvSpPr/>
           <p:nvPr/>
         </p:nvSpPr>
@@ -16643,7 +18276,7 @@
       </p:sp>
       <p:sp>
         <p:nvSpPr>
-          <p:cNvPr id="16" name="Oval 15"/>
+          <p:cNvPr id="18" name="Oval 17"/>
           <p:cNvSpPr/>
           <p:nvPr/>
         </p:nvSpPr>
@@ -16696,7 +18329,7 @@
       </p:sp>
       <p:sp>
         <p:nvSpPr>
-          <p:cNvPr id="17" name="TextBox 16"/>
+          <p:cNvPr id="19" name="TextBox 18"/>
           <p:cNvSpPr txBox="1"/>
           <p:nvPr/>
         </p:nvSpPr>
@@ -16730,7 +18363,7 @@
       </p:sp>
       <p:sp>
         <p:nvSpPr>
-          <p:cNvPr id="18" name="Rounded Rectangle 17"/>
+          <p:cNvPr id="20" name="Rounded Rectangle 19"/>
           <p:cNvSpPr/>
           <p:nvPr/>
         </p:nvSpPr>
@@ -16786,7 +18419,7 @@
       </p:sp>
       <p:sp>
         <p:nvSpPr>
-          <p:cNvPr id="19" name="Oval 18"/>
+          <p:cNvPr id="21" name="Oval 20"/>
           <p:cNvSpPr/>
           <p:nvPr/>
         </p:nvSpPr>
@@ -16839,7 +18472,7 @@
       </p:sp>
       <p:sp>
         <p:nvSpPr>
-          <p:cNvPr id="20" name="TextBox 19"/>
+          <p:cNvPr id="22" name="TextBox 21"/>
           <p:cNvSpPr txBox="1"/>
           <p:nvPr/>
         </p:nvSpPr>
@@ -16873,7 +18506,7 @@
       </p:sp>
       <p:sp>
         <p:nvSpPr>
-          <p:cNvPr id="21" name="Rounded Rectangle 20"/>
+          <p:cNvPr id="23" name="Rounded Rectangle 22"/>
           <p:cNvSpPr/>
           <p:nvPr/>
         </p:nvSpPr>
@@ -16932,7 +18565,7 @@
       </p:sp>
       <p:sp>
         <p:nvSpPr>
-          <p:cNvPr id="22" name="Oval 21"/>
+          <p:cNvPr id="24" name="Oval 23"/>
           <p:cNvSpPr/>
           <p:nvPr/>
         </p:nvSpPr>
@@ -16985,7 +18618,7 @@
       </p:sp>
       <p:sp>
         <p:nvSpPr>
-          <p:cNvPr id="23" name="TextBox 22"/>
+          <p:cNvPr id="25" name="TextBox 24"/>
           <p:cNvSpPr txBox="1"/>
           <p:nvPr/>
         </p:nvSpPr>
@@ -17019,7 +18652,7 @@
       </p:sp>
       <p:sp>
         <p:nvSpPr>
-          <p:cNvPr id="24" name="TextBox 23"/>
+          <p:cNvPr id="26" name="TextBox 25"/>
           <p:cNvSpPr txBox="1"/>
           <p:nvPr/>
         </p:nvSpPr>
@@ -17443,7 +19076,111 @@
       </p:pic>
       <p:sp>
         <p:nvSpPr>
-          <p:cNvPr id="11" name="TextBox 10"/>
+          <p:cNvPr id="11" name="Rounded Rectangle 10"/>
+          <p:cNvSpPr/>
+          <p:nvPr/>
+        </p:nvSpPr>
+        <p:spPr>
+          <a:xfrm>
+            <a:off x="411479" y="1444752"/>
+            <a:ext cx="11368735" cy="4800600"/>
+          </a:xfrm>
+          <a:prstGeom prst="roundRect">
+            <a:avLst>
+              <a:gd name="adj" fmla="val 4000"/>
+            </a:avLst>
+          </a:prstGeom>
+          <a:solidFill>
+            <a:srgbClr val="FFFFFF">
+              <a:alpha val="84000"/>
+            </a:srgbClr>
+          </a:solidFill>
+          <a:ln w="19050">
+            <a:solidFill>
+              <a:srgbClr val="FFFFFF"/>
+            </a:solidFill>
+          </a:ln>
+          <a:effectLst>
+            <a:outerShdw blurRad="203200" dist="50800" dir="5400000" algn="t" rotWithShape="0">
+              <a:srgbClr val="1A2340">
+                <a:alpha val="20000"/>
+              </a:srgbClr>
+            </a:outerShdw>
+          </a:effectLst>
+        </p:spPr>
+        <p:style>
+          <a:lnRef idx="1">
+            <a:schemeClr val="accent1"/>
+          </a:lnRef>
+          <a:fillRef idx="3">
+            <a:schemeClr val="accent1"/>
+          </a:fillRef>
+          <a:effectRef idx="2">
+            <a:schemeClr val="accent1"/>
+          </a:effectRef>
+          <a:fontRef idx="minor">
+            <a:schemeClr val="lt1"/>
+          </a:fontRef>
+        </p:style>
+        <p:txBody>
+          <a:bodyPr rtlCol="0" anchor="ctr"/>
+          <a:lstStyle/>
+          <a:p>
+            <a:pPr algn="ctr"/>
+          </a:p>
+        </p:txBody>
+      </p:sp>
+      <p:sp>
+        <p:nvSpPr>
+          <p:cNvPr id="12" name="Rounded Rectangle 11"/>
+          <p:cNvSpPr/>
+          <p:nvPr/>
+        </p:nvSpPr>
+        <p:spPr>
+          <a:xfrm>
+            <a:off x="731519" y="1508760"/>
+            <a:ext cx="10728655" cy="32004"/>
+          </a:xfrm>
+          <a:prstGeom prst="roundRect">
+            <a:avLst>
+              <a:gd name="adj" fmla="val 50000"/>
+            </a:avLst>
+          </a:prstGeom>
+          <a:solidFill>
+            <a:srgbClr val="FFFFFF">
+              <a:alpha val="85000"/>
+            </a:srgbClr>
+          </a:solidFill>
+          <a:ln>
+            <a:noFill/>
+          </a:ln>
+          <a:effectLst/>
+        </p:spPr>
+        <p:style>
+          <a:lnRef idx="1">
+            <a:schemeClr val="accent1"/>
+          </a:lnRef>
+          <a:fillRef idx="3">
+            <a:schemeClr val="accent1"/>
+          </a:fillRef>
+          <a:effectRef idx="2">
+            <a:schemeClr val="accent1"/>
+          </a:effectRef>
+          <a:fontRef idx="minor">
+            <a:schemeClr val="lt1"/>
+          </a:fontRef>
+        </p:style>
+        <p:txBody>
+          <a:bodyPr rtlCol="0" anchor="ctr"/>
+          <a:lstStyle/>
+          <a:p>
+            <a:pPr algn="ctr"/>
+          </a:p>
+        </p:txBody>
+      </p:sp>
+      <p:sp>
+        <p:nvSpPr>
+          <p:cNvPr id="13" name="TextBox 12"/>
           <p:cNvSpPr txBox="1"/>
           <p:nvPr/>
         </p:nvSpPr>
@@ -17477,7 +19214,7 @@
       </p:sp>
       <p:sp>
         <p:nvSpPr>
-          <p:cNvPr id="12" name="Rounded Rectangle 11"/>
+          <p:cNvPr id="14" name="Rounded Rectangle 13"/>
           <p:cNvSpPr/>
           <p:nvPr/>
         </p:nvSpPr>
@@ -17533,7 +19270,7 @@
       </p:sp>
       <p:sp>
         <p:nvSpPr>
-          <p:cNvPr id="13" name="Oval 12"/>
+          <p:cNvPr id="15" name="Oval 14"/>
           <p:cNvSpPr/>
           <p:nvPr/>
         </p:nvSpPr>
@@ -17586,7 +19323,7 @@
       </p:sp>
       <p:sp>
         <p:nvSpPr>
-          <p:cNvPr id="14" name="TextBox 13"/>
+          <p:cNvPr id="16" name="TextBox 15"/>
           <p:cNvSpPr txBox="1"/>
           <p:nvPr/>
         </p:nvSpPr>
@@ -17620,7 +19357,7 @@
       </p:sp>
       <p:sp>
         <p:nvSpPr>
-          <p:cNvPr id="15" name="Rounded Rectangle 14"/>
+          <p:cNvPr id="17" name="Rounded Rectangle 16"/>
           <p:cNvSpPr/>
           <p:nvPr/>
         </p:nvSpPr>
@@ -17676,7 +19413,7 @@
       </p:sp>
       <p:sp>
         <p:nvSpPr>
-          <p:cNvPr id="16" name="Oval 15"/>
+          <p:cNvPr id="18" name="Oval 17"/>
           <p:cNvSpPr/>
           <p:nvPr/>
         </p:nvSpPr>
@@ -17729,7 +19466,7 @@
       </p:sp>
       <p:sp>
         <p:nvSpPr>
-          <p:cNvPr id="17" name="TextBox 16"/>
+          <p:cNvPr id="19" name="TextBox 18"/>
           <p:cNvSpPr txBox="1"/>
           <p:nvPr/>
         </p:nvSpPr>
@@ -17763,7 +19500,7 @@
       </p:sp>
       <p:sp>
         <p:nvSpPr>
-          <p:cNvPr id="18" name="Rounded Rectangle 17"/>
+          <p:cNvPr id="20" name="Rounded Rectangle 19"/>
           <p:cNvSpPr/>
           <p:nvPr/>
         </p:nvSpPr>
@@ -17819,7 +19556,7 @@
       </p:sp>
       <p:sp>
         <p:nvSpPr>
-          <p:cNvPr id="19" name="Oval 18"/>
+          <p:cNvPr id="21" name="Oval 20"/>
           <p:cNvSpPr/>
           <p:nvPr/>
         </p:nvSpPr>
@@ -17872,7 +19609,7 @@
       </p:sp>
       <p:sp>
         <p:nvSpPr>
-          <p:cNvPr id="20" name="TextBox 19"/>
+          <p:cNvPr id="22" name="TextBox 21"/>
           <p:cNvSpPr txBox="1"/>
           <p:nvPr/>
         </p:nvSpPr>
@@ -17906,7 +19643,7 @@
       </p:sp>
       <p:sp>
         <p:nvSpPr>
-          <p:cNvPr id="21" name="Rounded Rectangle 20"/>
+          <p:cNvPr id="23" name="Rounded Rectangle 22"/>
           <p:cNvSpPr/>
           <p:nvPr/>
         </p:nvSpPr>
@@ -17962,7 +19699,7 @@
       </p:sp>
       <p:sp>
         <p:nvSpPr>
-          <p:cNvPr id="22" name="Oval 21"/>
+          <p:cNvPr id="24" name="Oval 23"/>
           <p:cNvSpPr/>
           <p:nvPr/>
         </p:nvSpPr>
@@ -18015,7 +19752,7 @@
       </p:sp>
       <p:sp>
         <p:nvSpPr>
-          <p:cNvPr id="23" name="TextBox 22"/>
+          <p:cNvPr id="25" name="TextBox 24"/>
           <p:cNvSpPr txBox="1"/>
           <p:nvPr/>
         </p:nvSpPr>
@@ -18430,7 +20167,111 @@
       </p:pic>
       <p:sp>
         <p:nvSpPr>
-          <p:cNvPr id="11" name="TextBox 10"/>
+          <p:cNvPr id="11" name="Rounded Rectangle 10"/>
+          <p:cNvSpPr/>
+          <p:nvPr/>
+        </p:nvSpPr>
+        <p:spPr>
+          <a:xfrm>
+            <a:off x="411479" y="1444752"/>
+            <a:ext cx="11368735" cy="4800600"/>
+          </a:xfrm>
+          <a:prstGeom prst="roundRect">
+            <a:avLst>
+              <a:gd name="adj" fmla="val 4000"/>
+            </a:avLst>
+          </a:prstGeom>
+          <a:solidFill>
+            <a:srgbClr val="FFFFFF">
+              <a:alpha val="84000"/>
+            </a:srgbClr>
+          </a:solidFill>
+          <a:ln w="19050">
+            <a:solidFill>
+              <a:srgbClr val="FFFFFF"/>
+            </a:solidFill>
+          </a:ln>
+          <a:effectLst>
+            <a:outerShdw blurRad="203200" dist="50800" dir="5400000" algn="t" rotWithShape="0">
+              <a:srgbClr val="1A2340">
+                <a:alpha val="20000"/>
+              </a:srgbClr>
+            </a:outerShdw>
+          </a:effectLst>
+        </p:spPr>
+        <p:style>
+          <a:lnRef idx="1">
+            <a:schemeClr val="accent1"/>
+          </a:lnRef>
+          <a:fillRef idx="3">
+            <a:schemeClr val="accent1"/>
+          </a:fillRef>
+          <a:effectRef idx="2">
+            <a:schemeClr val="accent1"/>
+          </a:effectRef>
+          <a:fontRef idx="minor">
+            <a:schemeClr val="lt1"/>
+          </a:fontRef>
+        </p:style>
+        <p:txBody>
+          <a:bodyPr rtlCol="0" anchor="ctr"/>
+          <a:lstStyle/>
+          <a:p>
+            <a:pPr algn="ctr"/>
+          </a:p>
+        </p:txBody>
+      </p:sp>
+      <p:sp>
+        <p:nvSpPr>
+          <p:cNvPr id="12" name="Rounded Rectangle 11"/>
+          <p:cNvSpPr/>
+          <p:nvPr/>
+        </p:nvSpPr>
+        <p:spPr>
+          <a:xfrm>
+            <a:off x="731519" y="1508760"/>
+            <a:ext cx="10728655" cy="32004"/>
+          </a:xfrm>
+          <a:prstGeom prst="roundRect">
+            <a:avLst>
+              <a:gd name="adj" fmla="val 50000"/>
+            </a:avLst>
+          </a:prstGeom>
+          <a:solidFill>
+            <a:srgbClr val="FFFFFF">
+              <a:alpha val="85000"/>
+            </a:srgbClr>
+          </a:solidFill>
+          <a:ln>
+            <a:noFill/>
+          </a:ln>
+          <a:effectLst/>
+        </p:spPr>
+        <p:style>
+          <a:lnRef idx="1">
+            <a:schemeClr val="accent1"/>
+          </a:lnRef>
+          <a:fillRef idx="3">
+            <a:schemeClr val="accent1"/>
+          </a:fillRef>
+          <a:effectRef idx="2">
+            <a:schemeClr val="accent1"/>
+          </a:effectRef>
+          <a:fontRef idx="minor">
+            <a:schemeClr val="lt1"/>
+          </a:fontRef>
+        </p:style>
+        <p:txBody>
+          <a:bodyPr rtlCol="0" anchor="ctr"/>
+          <a:lstStyle/>
+          <a:p>
+            <a:pPr algn="ctr"/>
+          </a:p>
+        </p:txBody>
+      </p:sp>
+      <p:sp>
+        <p:nvSpPr>
+          <p:cNvPr id="13" name="TextBox 12"/>
           <p:cNvSpPr txBox="1"/>
           <p:nvPr/>
         </p:nvSpPr>
@@ -18464,7 +20305,7 @@
       </p:sp>
       <p:sp>
         <p:nvSpPr>
-          <p:cNvPr id="12" name="Rounded Rectangle 11"/>
+          <p:cNvPr id="14" name="Rounded Rectangle 13"/>
           <p:cNvSpPr/>
           <p:nvPr/>
         </p:nvSpPr>
@@ -18523,7 +20364,7 @@
       </p:sp>
       <p:sp>
         <p:nvSpPr>
-          <p:cNvPr id="13" name="Oval 12"/>
+          <p:cNvPr id="15" name="Oval 14"/>
           <p:cNvSpPr/>
           <p:nvPr/>
         </p:nvSpPr>
@@ -18576,7 +20417,7 @@
       </p:sp>
       <p:sp>
         <p:nvSpPr>
-          <p:cNvPr id="14" name="TextBox 13"/>
+          <p:cNvPr id="16" name="TextBox 15"/>
           <p:cNvSpPr txBox="1"/>
           <p:nvPr/>
         </p:nvSpPr>
@@ -18610,7 +20451,7 @@
       </p:sp>
       <p:sp>
         <p:nvSpPr>
-          <p:cNvPr id="15" name="Rounded Rectangle 14"/>
+          <p:cNvPr id="17" name="Rounded Rectangle 16"/>
           <p:cNvSpPr/>
           <p:nvPr/>
         </p:nvSpPr>
@@ -18666,7 +20507,7 @@
       </p:sp>
       <p:sp>
         <p:nvSpPr>
-          <p:cNvPr id="16" name="Oval 15"/>
+          <p:cNvPr id="18" name="Oval 17"/>
           <p:cNvSpPr/>
           <p:nvPr/>
         </p:nvSpPr>
@@ -18719,7 +20560,7 @@
       </p:sp>
       <p:sp>
         <p:nvSpPr>
-          <p:cNvPr id="17" name="TextBox 16"/>
+          <p:cNvPr id="19" name="TextBox 18"/>
           <p:cNvSpPr txBox="1"/>
           <p:nvPr/>
         </p:nvSpPr>
@@ -18753,7 +20594,7 @@
       </p:sp>
       <p:sp>
         <p:nvSpPr>
-          <p:cNvPr id="18" name="Rounded Rectangle 17"/>
+          <p:cNvPr id="20" name="Rounded Rectangle 19"/>
           <p:cNvSpPr/>
           <p:nvPr/>
         </p:nvSpPr>
@@ -18809,7 +20650,7 @@
       </p:sp>
       <p:sp>
         <p:nvSpPr>
-          <p:cNvPr id="19" name="Oval 18"/>
+          <p:cNvPr id="21" name="Oval 20"/>
           <p:cNvSpPr/>
           <p:nvPr/>
         </p:nvSpPr>
@@ -18862,7 +20703,7 @@
       </p:sp>
       <p:sp>
         <p:nvSpPr>
-          <p:cNvPr id="20" name="TextBox 19"/>
+          <p:cNvPr id="22" name="TextBox 21"/>
           <p:cNvSpPr txBox="1"/>
           <p:nvPr/>
         </p:nvSpPr>
@@ -18896,7 +20737,7 @@
       </p:sp>
       <p:sp>
         <p:nvSpPr>
-          <p:cNvPr id="21" name="Rounded Rectangle 20"/>
+          <p:cNvPr id="23" name="Rounded Rectangle 22"/>
           <p:cNvSpPr/>
           <p:nvPr/>
         </p:nvSpPr>
@@ -18952,7 +20793,7 @@
       </p:sp>
       <p:sp>
         <p:nvSpPr>
-          <p:cNvPr id="22" name="Oval 21"/>
+          <p:cNvPr id="24" name="Oval 23"/>
           <p:cNvSpPr/>
           <p:nvPr/>
         </p:nvSpPr>
@@ -19005,7 +20846,7 @@
       </p:sp>
       <p:sp>
         <p:nvSpPr>
-          <p:cNvPr id="23" name="TextBox 22"/>
+          <p:cNvPr id="25" name="TextBox 24"/>
           <p:cNvSpPr txBox="1"/>
           <p:nvPr/>
         </p:nvSpPr>
@@ -19039,7 +20880,7 @@
       </p:sp>
       <p:sp>
         <p:nvSpPr>
-          <p:cNvPr id="24" name="TextBox 23"/>
+          <p:cNvPr id="26" name="TextBox 25"/>
           <p:cNvSpPr txBox="1"/>
           <p:nvPr/>
         </p:nvSpPr>
@@ -20238,7 +22079,111 @@
       </p:pic>
       <p:sp>
         <p:nvSpPr>
-          <p:cNvPr id="11" name="Oval 10"/>
+          <p:cNvPr id="11" name="Rounded Rectangle 10"/>
+          <p:cNvSpPr/>
+          <p:nvPr/>
+        </p:nvSpPr>
+        <p:spPr>
+          <a:xfrm>
+            <a:off x="411479" y="1444752"/>
+            <a:ext cx="11368735" cy="4800600"/>
+          </a:xfrm>
+          <a:prstGeom prst="roundRect">
+            <a:avLst>
+              <a:gd name="adj" fmla="val 4000"/>
+            </a:avLst>
+          </a:prstGeom>
+          <a:solidFill>
+            <a:srgbClr val="FFFFFF">
+              <a:alpha val="84000"/>
+            </a:srgbClr>
+          </a:solidFill>
+          <a:ln w="19050">
+            <a:solidFill>
+              <a:srgbClr val="FFFFFF"/>
+            </a:solidFill>
+          </a:ln>
+          <a:effectLst>
+            <a:outerShdw blurRad="203200" dist="50800" dir="5400000" algn="t" rotWithShape="0">
+              <a:srgbClr val="1A2340">
+                <a:alpha val="20000"/>
+              </a:srgbClr>
+            </a:outerShdw>
+          </a:effectLst>
+        </p:spPr>
+        <p:style>
+          <a:lnRef idx="1">
+            <a:schemeClr val="accent1"/>
+          </a:lnRef>
+          <a:fillRef idx="3">
+            <a:schemeClr val="accent1"/>
+          </a:fillRef>
+          <a:effectRef idx="2">
+            <a:schemeClr val="accent1"/>
+          </a:effectRef>
+          <a:fontRef idx="minor">
+            <a:schemeClr val="lt1"/>
+          </a:fontRef>
+        </p:style>
+        <p:txBody>
+          <a:bodyPr rtlCol="0" anchor="ctr"/>
+          <a:lstStyle/>
+          <a:p>
+            <a:pPr algn="ctr"/>
+          </a:p>
+        </p:txBody>
+      </p:sp>
+      <p:sp>
+        <p:nvSpPr>
+          <p:cNvPr id="12" name="Rounded Rectangle 11"/>
+          <p:cNvSpPr/>
+          <p:nvPr/>
+        </p:nvSpPr>
+        <p:spPr>
+          <a:xfrm>
+            <a:off x="731519" y="1508760"/>
+            <a:ext cx="10728655" cy="32004"/>
+          </a:xfrm>
+          <a:prstGeom prst="roundRect">
+            <a:avLst>
+              <a:gd name="adj" fmla="val 50000"/>
+            </a:avLst>
+          </a:prstGeom>
+          <a:solidFill>
+            <a:srgbClr val="FFFFFF">
+              <a:alpha val="85000"/>
+            </a:srgbClr>
+          </a:solidFill>
+          <a:ln>
+            <a:noFill/>
+          </a:ln>
+          <a:effectLst/>
+        </p:spPr>
+        <p:style>
+          <a:lnRef idx="1">
+            <a:schemeClr val="accent1"/>
+          </a:lnRef>
+          <a:fillRef idx="3">
+            <a:schemeClr val="accent1"/>
+          </a:fillRef>
+          <a:effectRef idx="2">
+            <a:schemeClr val="accent1"/>
+          </a:effectRef>
+          <a:fontRef idx="minor">
+            <a:schemeClr val="lt1"/>
+          </a:fontRef>
+        </p:style>
+        <p:txBody>
+          <a:bodyPr rtlCol="0" anchor="ctr"/>
+          <a:lstStyle/>
+          <a:p>
+            <a:pPr algn="ctr"/>
+          </a:p>
+        </p:txBody>
+      </p:sp>
+      <p:sp>
+        <p:nvSpPr>
+          <p:cNvPr id="13" name="Oval 12"/>
           <p:cNvSpPr/>
           <p:nvPr/>
         </p:nvSpPr>
@@ -20291,7 +22236,7 @@
       </p:sp>
       <p:sp>
         <p:nvSpPr>
-          <p:cNvPr id="12" name="TextBox 11"/>
+          <p:cNvPr id="14" name="TextBox 13"/>
           <p:cNvSpPr txBox="1"/>
           <p:nvPr/>
         </p:nvSpPr>
@@ -20325,7 +22270,7 @@
       </p:sp>
       <p:sp>
         <p:nvSpPr>
-          <p:cNvPr id="13" name="Oval 12"/>
+          <p:cNvPr id="15" name="Oval 14"/>
           <p:cNvSpPr/>
           <p:nvPr/>
         </p:nvSpPr>
@@ -20378,7 +22323,7 @@
       </p:sp>
       <p:sp>
         <p:nvSpPr>
-          <p:cNvPr id="14" name="TextBox 13"/>
+          <p:cNvPr id="16" name="TextBox 15"/>
           <p:cNvSpPr txBox="1"/>
           <p:nvPr/>
         </p:nvSpPr>
@@ -20412,7 +22357,7 @@
       </p:sp>
       <p:sp>
         <p:nvSpPr>
-          <p:cNvPr id="15" name="Oval 14"/>
+          <p:cNvPr id="17" name="Oval 16"/>
           <p:cNvSpPr/>
           <p:nvPr/>
         </p:nvSpPr>
@@ -20465,7 +22410,7 @@
       </p:sp>
       <p:sp>
         <p:nvSpPr>
-          <p:cNvPr id="16" name="TextBox 15"/>
+          <p:cNvPr id="18" name="TextBox 17"/>
           <p:cNvSpPr txBox="1"/>
           <p:nvPr/>
         </p:nvSpPr>
@@ -20499,7 +22444,7 @@
       </p:sp>
       <p:sp>
         <p:nvSpPr>
-          <p:cNvPr id="17" name="Oval 16"/>
+          <p:cNvPr id="19" name="Oval 18"/>
           <p:cNvSpPr/>
           <p:nvPr/>
         </p:nvSpPr>
@@ -20552,7 +22497,7 @@
       </p:sp>
       <p:sp>
         <p:nvSpPr>
-          <p:cNvPr id="18" name="TextBox 17"/>
+          <p:cNvPr id="20" name="TextBox 19"/>
           <p:cNvSpPr txBox="1"/>
           <p:nvPr/>
         </p:nvSpPr>
@@ -20586,7 +22531,7 @@
       </p:sp>
       <p:sp>
         <p:nvSpPr>
-          <p:cNvPr id="19" name="Oval 18"/>
+          <p:cNvPr id="21" name="Oval 20"/>
           <p:cNvSpPr/>
           <p:nvPr/>
         </p:nvSpPr>
@@ -20639,7 +22584,7 @@
       </p:sp>
       <p:sp>
         <p:nvSpPr>
-          <p:cNvPr id="20" name="TextBox 19"/>
+          <p:cNvPr id="22" name="TextBox 21"/>
           <p:cNvSpPr txBox="1"/>
           <p:nvPr/>
         </p:nvSpPr>
@@ -20673,7 +22618,7 @@
       </p:sp>
       <p:sp>
         <p:nvSpPr>
-          <p:cNvPr id="21" name="Oval 20"/>
+          <p:cNvPr id="23" name="Oval 22"/>
           <p:cNvSpPr/>
           <p:nvPr/>
         </p:nvSpPr>
@@ -20726,7 +22671,7 @@
       </p:sp>
       <p:sp>
         <p:nvSpPr>
-          <p:cNvPr id="22" name="TextBox 21"/>
+          <p:cNvPr id="24" name="TextBox 23"/>
           <p:cNvSpPr txBox="1"/>
           <p:nvPr/>
         </p:nvSpPr>
@@ -20760,7 +22705,7 @@
       </p:sp>
       <p:sp>
         <p:nvSpPr>
-          <p:cNvPr id="23" name="Oval 22"/>
+          <p:cNvPr id="25" name="Oval 24"/>
           <p:cNvSpPr/>
           <p:nvPr/>
         </p:nvSpPr>
@@ -20813,7 +22758,7 @@
       </p:sp>
       <p:sp>
         <p:nvSpPr>
-          <p:cNvPr id="24" name="TextBox 23"/>
+          <p:cNvPr id="26" name="TextBox 25"/>
           <p:cNvSpPr txBox="1"/>
           <p:nvPr/>
         </p:nvSpPr>
@@ -20847,7 +22792,7 @@
       </p:sp>
       <p:sp>
         <p:nvSpPr>
-          <p:cNvPr id="25" name="Oval 24"/>
+          <p:cNvPr id="27" name="Oval 26"/>
           <p:cNvSpPr/>
           <p:nvPr/>
         </p:nvSpPr>
@@ -20900,7 +22845,7 @@
       </p:sp>
       <p:sp>
         <p:nvSpPr>
-          <p:cNvPr id="26" name="TextBox 25"/>
+          <p:cNvPr id="28" name="TextBox 27"/>
           <p:cNvSpPr txBox="1"/>
           <p:nvPr/>
         </p:nvSpPr>
@@ -21313,9 +23258,113 @@
           </a:prstGeom>
         </p:spPr>
       </p:pic>
+      <p:sp>
+        <p:nvSpPr>
+          <p:cNvPr id="11" name="Rounded Rectangle 10"/>
+          <p:cNvSpPr/>
+          <p:nvPr/>
+        </p:nvSpPr>
+        <p:spPr>
+          <a:xfrm>
+            <a:off x="411479" y="1444752"/>
+            <a:ext cx="11368735" cy="4800600"/>
+          </a:xfrm>
+          <a:prstGeom prst="roundRect">
+            <a:avLst>
+              <a:gd name="adj" fmla="val 4000"/>
+            </a:avLst>
+          </a:prstGeom>
+          <a:solidFill>
+            <a:srgbClr val="FFFFFF">
+              <a:alpha val="84000"/>
+            </a:srgbClr>
+          </a:solidFill>
+          <a:ln w="19050">
+            <a:solidFill>
+              <a:srgbClr val="FFFFFF"/>
+            </a:solidFill>
+          </a:ln>
+          <a:effectLst>
+            <a:outerShdw blurRad="203200" dist="50800" dir="5400000" algn="t" rotWithShape="0">
+              <a:srgbClr val="1A2340">
+                <a:alpha val="20000"/>
+              </a:srgbClr>
+            </a:outerShdw>
+          </a:effectLst>
+        </p:spPr>
+        <p:style>
+          <a:lnRef idx="1">
+            <a:schemeClr val="accent1"/>
+          </a:lnRef>
+          <a:fillRef idx="3">
+            <a:schemeClr val="accent1"/>
+          </a:fillRef>
+          <a:effectRef idx="2">
+            <a:schemeClr val="accent1"/>
+          </a:effectRef>
+          <a:fontRef idx="minor">
+            <a:schemeClr val="lt1"/>
+          </a:fontRef>
+        </p:style>
+        <p:txBody>
+          <a:bodyPr rtlCol="0" anchor="ctr"/>
+          <a:lstStyle/>
+          <a:p>
+            <a:pPr algn="ctr"/>
+          </a:p>
+        </p:txBody>
+      </p:sp>
+      <p:sp>
+        <p:nvSpPr>
+          <p:cNvPr id="12" name="Rounded Rectangle 11"/>
+          <p:cNvSpPr/>
+          <p:nvPr/>
+        </p:nvSpPr>
+        <p:spPr>
+          <a:xfrm>
+            <a:off x="731519" y="1508760"/>
+            <a:ext cx="10728655" cy="32004"/>
+          </a:xfrm>
+          <a:prstGeom prst="roundRect">
+            <a:avLst>
+              <a:gd name="adj" fmla="val 50000"/>
+            </a:avLst>
+          </a:prstGeom>
+          <a:solidFill>
+            <a:srgbClr val="FFFFFF">
+              <a:alpha val="85000"/>
+            </a:srgbClr>
+          </a:solidFill>
+          <a:ln>
+            <a:noFill/>
+          </a:ln>
+          <a:effectLst/>
+        </p:spPr>
+        <p:style>
+          <a:lnRef idx="1">
+            <a:schemeClr val="accent1"/>
+          </a:lnRef>
+          <a:fillRef idx="3">
+            <a:schemeClr val="accent1"/>
+          </a:fillRef>
+          <a:effectRef idx="2">
+            <a:schemeClr val="accent1"/>
+          </a:effectRef>
+          <a:fontRef idx="minor">
+            <a:schemeClr val="lt1"/>
+          </a:fontRef>
+        </p:style>
+        <p:txBody>
+          <a:bodyPr rtlCol="0" anchor="ctr"/>
+          <a:lstStyle/>
+          <a:p>
+            <a:pPr algn="ctr"/>
+          </a:p>
+        </p:txBody>
+      </p:sp>
       <p:graphicFrame>
         <p:nvGraphicFramePr>
-          <p:cNvPr id="11" name="Table 10"/>
+          <p:cNvPr id="13" name="Table 12"/>
           <p:cNvGraphicFramePr>
             <a:graphicFrameLocks noGrp="1"/>
           </p:cNvGraphicFramePr>
@@ -22131,14 +24180,177 @@
       </p:pic>
       <p:sp>
         <p:nvSpPr>
-          <p:cNvPr id="11" name="TextBox 10"/>
+          <p:cNvPr id="11" name="Rounded Rectangle 10"/>
+          <p:cNvSpPr/>
+          <p:nvPr/>
+        </p:nvSpPr>
+        <p:spPr>
+          <a:xfrm>
+            <a:off x="411479" y="1444752"/>
+            <a:ext cx="11368735" cy="4800600"/>
+          </a:xfrm>
+          <a:prstGeom prst="roundRect">
+            <a:avLst>
+              <a:gd name="adj" fmla="val 4000"/>
+            </a:avLst>
+          </a:prstGeom>
+          <a:solidFill>
+            <a:srgbClr val="FFFFFF">
+              <a:alpha val="84000"/>
+            </a:srgbClr>
+          </a:solidFill>
+          <a:ln w="19050">
+            <a:solidFill>
+              <a:srgbClr val="FFFFFF"/>
+            </a:solidFill>
+          </a:ln>
+          <a:effectLst>
+            <a:outerShdw blurRad="203200" dist="50800" dir="5400000" algn="t" rotWithShape="0">
+              <a:srgbClr val="1A2340">
+                <a:alpha val="20000"/>
+              </a:srgbClr>
+            </a:outerShdw>
+          </a:effectLst>
+        </p:spPr>
+        <p:style>
+          <a:lnRef idx="1">
+            <a:schemeClr val="accent1"/>
+          </a:lnRef>
+          <a:fillRef idx="3">
+            <a:schemeClr val="accent1"/>
+          </a:fillRef>
+          <a:effectRef idx="2">
+            <a:schemeClr val="accent1"/>
+          </a:effectRef>
+          <a:fontRef idx="minor">
+            <a:schemeClr val="lt1"/>
+          </a:fontRef>
+        </p:style>
+        <p:txBody>
+          <a:bodyPr rtlCol="0" anchor="ctr"/>
+          <a:lstStyle/>
+          <a:p>
+            <a:pPr algn="ctr"/>
+          </a:p>
+        </p:txBody>
+      </p:sp>
+      <p:sp>
+        <p:nvSpPr>
+          <p:cNvPr id="12" name="Rounded Rectangle 11"/>
+          <p:cNvSpPr/>
+          <p:nvPr/>
+        </p:nvSpPr>
+        <p:spPr>
+          <a:xfrm>
+            <a:off x="731519" y="1508760"/>
+            <a:ext cx="10728655" cy="32004"/>
+          </a:xfrm>
+          <a:prstGeom prst="roundRect">
+            <a:avLst>
+              <a:gd name="adj" fmla="val 50000"/>
+            </a:avLst>
+          </a:prstGeom>
+          <a:solidFill>
+            <a:srgbClr val="FFFFFF">
+              <a:alpha val="85000"/>
+            </a:srgbClr>
+          </a:solidFill>
+          <a:ln>
+            <a:noFill/>
+          </a:ln>
+          <a:effectLst/>
+        </p:spPr>
+        <p:style>
+          <a:lnRef idx="1">
+            <a:schemeClr val="accent1"/>
+          </a:lnRef>
+          <a:fillRef idx="3">
+            <a:schemeClr val="accent1"/>
+          </a:fillRef>
+          <a:effectRef idx="2">
+            <a:schemeClr val="accent1"/>
+          </a:effectRef>
+          <a:fontRef idx="minor">
+            <a:schemeClr val="lt1"/>
+          </a:fontRef>
+        </p:style>
+        <p:txBody>
+          <a:bodyPr rtlCol="0" anchor="ctr"/>
+          <a:lstStyle/>
+          <a:p>
+            <a:pPr algn="ctr"/>
+          </a:p>
+        </p:txBody>
+      </p:sp>
+      <p:sp>
+        <p:nvSpPr>
+          <p:cNvPr id="13" name="Rounded Rectangle 12"/>
+          <p:cNvSpPr/>
+          <p:nvPr/>
+        </p:nvSpPr>
+        <p:spPr>
+          <a:xfrm>
+            <a:off x="548640" y="1591056"/>
+            <a:ext cx="64008" cy="1152144"/>
+          </a:xfrm>
+          <a:prstGeom prst="roundRect">
+            <a:avLst>
+              <a:gd name="adj" fmla="val 50000"/>
+            </a:avLst>
+          </a:prstGeom>
+          <a:solidFill>
+            <a:srgbClr val="8D6A2A"/>
+          </a:solidFill>
+          <a:ln>
+            <a:noFill/>
+          </a:ln>
+          <a:effectLst>
+            <a:outerShdw blurRad="203200" dist="50800" dir="5400000" algn="t" rotWithShape="0">
+              <a:srgbClr val="1A2340">
+                <a:alpha val="20000"/>
+              </a:srgbClr>
+            </a:outerShdw>
+          </a:effectLst>
+          <a:scene3d>
+            <a:camera prst="orthographicFront"/>
+            <a:lightRig rig="threePt" dir="t"/>
+          </a:scene3d>
+          <a:sp3d>
+            <a:bevelT w="44450" h="25400" prst="softRound"/>
+          </a:sp3d>
+        </p:spPr>
+        <p:style>
+          <a:lnRef idx="1">
+            <a:schemeClr val="accent1"/>
+          </a:lnRef>
+          <a:fillRef idx="3">
+            <a:schemeClr val="accent1"/>
+          </a:fillRef>
+          <a:effectRef idx="2">
+            <a:schemeClr val="accent1"/>
+          </a:effectRef>
+          <a:fontRef idx="minor">
+            <a:schemeClr val="lt1"/>
+          </a:fontRef>
+        </p:style>
+        <p:txBody>
+          <a:bodyPr rtlCol="0" anchor="ctr"/>
+          <a:lstStyle/>
+          <a:p>
+            <a:pPr algn="ctr"/>
+          </a:p>
+        </p:txBody>
+      </p:sp>
+      <p:sp>
+        <p:nvSpPr>
+          <p:cNvPr id="14" name="TextBox 13"/>
           <p:cNvSpPr txBox="1"/>
           <p:nvPr/>
         </p:nvSpPr>
         <p:spPr>
           <a:xfrm>
-            <a:off x="548640" y="1554480"/>
-            <a:ext cx="11094415" cy="1389888"/>
+            <a:off x="777240" y="1554480"/>
+            <a:ext cx="10865815" cy="1389888"/>
           </a:xfrm>
           <a:prstGeom prst="rect">
             <a:avLst/>
@@ -22204,9 +24416,63 @@
           </a:p>
         </p:txBody>
       </p:sp>
+      <p:sp>
+        <p:nvSpPr>
+          <p:cNvPr id="15" name="Rounded Rectangle 14"/>
+          <p:cNvSpPr/>
+          <p:nvPr/>
+        </p:nvSpPr>
+        <p:spPr>
+          <a:xfrm>
+            <a:off x="548640" y="3127248"/>
+            <a:ext cx="11094415" cy="3044952"/>
+          </a:xfrm>
+          <a:prstGeom prst="roundRect">
+            <a:avLst>
+              <a:gd name="adj" fmla="val 3000"/>
+            </a:avLst>
+          </a:prstGeom>
+          <a:solidFill>
+            <a:srgbClr val="FFFFFF"/>
+          </a:solidFill>
+          <a:ln w="9525">
+            <a:solidFill>
+              <a:srgbClr val="DDDFEE"/>
+            </a:solidFill>
+          </a:ln>
+          <a:effectLst>
+            <a:outerShdw blurRad="203200" dist="50800" dir="5400000" algn="t" rotWithShape="0">
+              <a:srgbClr val="1A2340">
+                <a:alpha val="20000"/>
+              </a:srgbClr>
+            </a:outerShdw>
+          </a:effectLst>
+        </p:spPr>
+        <p:style>
+          <a:lnRef idx="1">
+            <a:schemeClr val="accent1"/>
+          </a:lnRef>
+          <a:fillRef idx="3">
+            <a:schemeClr val="accent1"/>
+          </a:fillRef>
+          <a:effectRef idx="2">
+            <a:schemeClr val="accent1"/>
+          </a:effectRef>
+          <a:fontRef idx="minor">
+            <a:schemeClr val="lt1"/>
+          </a:fontRef>
+        </p:style>
+        <p:txBody>
+          <a:bodyPr rtlCol="0" anchor="ctr"/>
+          <a:lstStyle/>
+          <a:p>
+            <a:pPr algn="ctr"/>
+          </a:p>
+        </p:txBody>
+      </p:sp>
       <p:pic>
         <p:nvPicPr>
-          <p:cNvPr id="12" name="Picture 11" descr="Top view of five subunits (two alpha, two beta, one gamma) around a chloride channel, with GABA sites between alpha and beta and the benzodiazepine site between alpha and gamma. A side panel summarises the action of each drug group."/>
+          <p:cNvPr id="16" name="Picture 15" descr="Top view of five subunits (two alpha, two beta, one gamma) around a chloride channel, with GABA sites between alpha and beta and the benzodiazepine site between alpha and gamma. A side panel summarises the action of each drug group."/>
           <p:cNvPicPr>
             <a:picLocks noChangeAspect="1"/>
           </p:cNvPicPr>
@@ -22220,8 +24486,8 @@
         </p:blipFill>
         <p:spPr>
           <a:xfrm>
-            <a:off x="3450519" y="3127248"/>
-            <a:ext cx="5290657" cy="2587752"/>
+            <a:off x="3637468" y="3236976"/>
+            <a:ext cx="4916758" cy="2404872"/>
           </a:xfrm>
           <a:prstGeom prst="rect">
             <a:avLst/>
@@ -22230,14 +24496,14 @@
       </p:pic>
       <p:sp>
         <p:nvSpPr>
-          <p:cNvPr id="13" name="TextBox 12"/>
+          <p:cNvPr id="17" name="TextBox 16"/>
           <p:cNvSpPr txBox="1"/>
           <p:nvPr/>
         </p:nvSpPr>
         <p:spPr>
           <a:xfrm>
-            <a:off x="548640" y="5806440"/>
-            <a:ext cx="11094415" cy="365760"/>
+            <a:off x="685800" y="5733288"/>
+            <a:ext cx="10820095" cy="365760"/>
           </a:xfrm>
           <a:prstGeom prst="rect">
             <a:avLst/>
@@ -22646,14 +24912,177 @@
       </p:pic>
       <p:sp>
         <p:nvSpPr>
-          <p:cNvPr id="11" name="TextBox 10"/>
+          <p:cNvPr id="11" name="Rounded Rectangle 10"/>
+          <p:cNvSpPr/>
+          <p:nvPr/>
+        </p:nvSpPr>
+        <p:spPr>
+          <a:xfrm>
+            <a:off x="411479" y="1444752"/>
+            <a:ext cx="11368735" cy="4800600"/>
+          </a:xfrm>
+          <a:prstGeom prst="roundRect">
+            <a:avLst>
+              <a:gd name="adj" fmla="val 4000"/>
+            </a:avLst>
+          </a:prstGeom>
+          <a:solidFill>
+            <a:srgbClr val="FFFFFF">
+              <a:alpha val="84000"/>
+            </a:srgbClr>
+          </a:solidFill>
+          <a:ln w="19050">
+            <a:solidFill>
+              <a:srgbClr val="FFFFFF"/>
+            </a:solidFill>
+          </a:ln>
+          <a:effectLst>
+            <a:outerShdw blurRad="203200" dist="50800" dir="5400000" algn="t" rotWithShape="0">
+              <a:srgbClr val="1A2340">
+                <a:alpha val="20000"/>
+              </a:srgbClr>
+            </a:outerShdw>
+          </a:effectLst>
+        </p:spPr>
+        <p:style>
+          <a:lnRef idx="1">
+            <a:schemeClr val="accent1"/>
+          </a:lnRef>
+          <a:fillRef idx="3">
+            <a:schemeClr val="accent1"/>
+          </a:fillRef>
+          <a:effectRef idx="2">
+            <a:schemeClr val="accent1"/>
+          </a:effectRef>
+          <a:fontRef idx="minor">
+            <a:schemeClr val="lt1"/>
+          </a:fontRef>
+        </p:style>
+        <p:txBody>
+          <a:bodyPr rtlCol="0" anchor="ctr"/>
+          <a:lstStyle/>
+          <a:p>
+            <a:pPr algn="ctr"/>
+          </a:p>
+        </p:txBody>
+      </p:sp>
+      <p:sp>
+        <p:nvSpPr>
+          <p:cNvPr id="12" name="Rounded Rectangle 11"/>
+          <p:cNvSpPr/>
+          <p:nvPr/>
+        </p:nvSpPr>
+        <p:spPr>
+          <a:xfrm>
+            <a:off x="731519" y="1508760"/>
+            <a:ext cx="10728655" cy="32004"/>
+          </a:xfrm>
+          <a:prstGeom prst="roundRect">
+            <a:avLst>
+              <a:gd name="adj" fmla="val 50000"/>
+            </a:avLst>
+          </a:prstGeom>
+          <a:solidFill>
+            <a:srgbClr val="FFFFFF">
+              <a:alpha val="85000"/>
+            </a:srgbClr>
+          </a:solidFill>
+          <a:ln>
+            <a:noFill/>
+          </a:ln>
+          <a:effectLst/>
+        </p:spPr>
+        <p:style>
+          <a:lnRef idx="1">
+            <a:schemeClr val="accent1"/>
+          </a:lnRef>
+          <a:fillRef idx="3">
+            <a:schemeClr val="accent1"/>
+          </a:fillRef>
+          <a:effectRef idx="2">
+            <a:schemeClr val="accent1"/>
+          </a:effectRef>
+          <a:fontRef idx="minor">
+            <a:schemeClr val="lt1"/>
+          </a:fontRef>
+        </p:style>
+        <p:txBody>
+          <a:bodyPr rtlCol="0" anchor="ctr"/>
+          <a:lstStyle/>
+          <a:p>
+            <a:pPr algn="ctr"/>
+          </a:p>
+        </p:txBody>
+      </p:sp>
+      <p:sp>
+        <p:nvSpPr>
+          <p:cNvPr id="13" name="Rounded Rectangle 12"/>
+          <p:cNvSpPr/>
+          <p:nvPr/>
+        </p:nvSpPr>
+        <p:spPr>
+          <a:xfrm>
+            <a:off x="548640" y="1591056"/>
+            <a:ext cx="64008" cy="594360"/>
+          </a:xfrm>
+          <a:prstGeom prst="roundRect">
+            <a:avLst>
+              <a:gd name="adj" fmla="val 50000"/>
+            </a:avLst>
+          </a:prstGeom>
+          <a:solidFill>
+            <a:srgbClr val="8D6A2A"/>
+          </a:solidFill>
+          <a:ln>
+            <a:noFill/>
+          </a:ln>
+          <a:effectLst>
+            <a:outerShdw blurRad="203200" dist="50800" dir="5400000" algn="t" rotWithShape="0">
+              <a:srgbClr val="1A2340">
+                <a:alpha val="20000"/>
+              </a:srgbClr>
+            </a:outerShdw>
+          </a:effectLst>
+          <a:scene3d>
+            <a:camera prst="orthographicFront"/>
+            <a:lightRig rig="threePt" dir="t"/>
+          </a:scene3d>
+          <a:sp3d>
+            <a:bevelT w="44450" h="25400" prst="softRound"/>
+          </a:sp3d>
+        </p:spPr>
+        <p:style>
+          <a:lnRef idx="1">
+            <a:schemeClr val="accent1"/>
+          </a:lnRef>
+          <a:fillRef idx="3">
+            <a:schemeClr val="accent1"/>
+          </a:fillRef>
+          <a:effectRef idx="2">
+            <a:schemeClr val="accent1"/>
+          </a:effectRef>
+          <a:fontRef idx="minor">
+            <a:schemeClr val="lt1"/>
+          </a:fontRef>
+        </p:style>
+        <p:txBody>
+          <a:bodyPr rtlCol="0" anchor="ctr"/>
+          <a:lstStyle/>
+          <a:p>
+            <a:pPr algn="ctr"/>
+          </a:p>
+        </p:txBody>
+      </p:sp>
+      <p:sp>
+        <p:nvSpPr>
+          <p:cNvPr id="14" name="TextBox 13"/>
           <p:cNvSpPr txBox="1"/>
           <p:nvPr/>
         </p:nvSpPr>
         <p:spPr>
           <a:xfrm>
-            <a:off x="548640" y="1554480"/>
-            <a:ext cx="11094415" cy="795528"/>
+            <a:off x="777240" y="1554480"/>
+            <a:ext cx="10865815" cy="795528"/>
           </a:xfrm>
           <a:prstGeom prst="rect">
             <a:avLst/>
@@ -22685,7 +25114,7 @@
       </p:sp>
       <p:graphicFrame>
         <p:nvGraphicFramePr>
-          <p:cNvPr id="12" name="Table 11"/>
+          <p:cNvPr id="15" name="Table 14"/>
           <p:cNvGraphicFramePr>
             <a:graphicFrameLocks noGrp="1"/>
           </p:cNvGraphicFramePr>
@@ -23365,14 +25794,177 @@
       </p:pic>
       <p:sp>
         <p:nvSpPr>
-          <p:cNvPr id="11" name="TextBox 10"/>
+          <p:cNvPr id="11" name="Rounded Rectangle 10"/>
+          <p:cNvSpPr/>
+          <p:nvPr/>
+        </p:nvSpPr>
+        <p:spPr>
+          <a:xfrm>
+            <a:off x="411479" y="1444752"/>
+            <a:ext cx="11368735" cy="4800600"/>
+          </a:xfrm>
+          <a:prstGeom prst="roundRect">
+            <a:avLst>
+              <a:gd name="adj" fmla="val 4000"/>
+            </a:avLst>
+          </a:prstGeom>
+          <a:solidFill>
+            <a:srgbClr val="FFFFFF">
+              <a:alpha val="84000"/>
+            </a:srgbClr>
+          </a:solidFill>
+          <a:ln w="19050">
+            <a:solidFill>
+              <a:srgbClr val="FFFFFF"/>
+            </a:solidFill>
+          </a:ln>
+          <a:effectLst>
+            <a:outerShdw blurRad="203200" dist="50800" dir="5400000" algn="t" rotWithShape="0">
+              <a:srgbClr val="1A2340">
+                <a:alpha val="20000"/>
+              </a:srgbClr>
+            </a:outerShdw>
+          </a:effectLst>
+        </p:spPr>
+        <p:style>
+          <a:lnRef idx="1">
+            <a:schemeClr val="accent1"/>
+          </a:lnRef>
+          <a:fillRef idx="3">
+            <a:schemeClr val="accent1"/>
+          </a:fillRef>
+          <a:effectRef idx="2">
+            <a:schemeClr val="accent1"/>
+          </a:effectRef>
+          <a:fontRef idx="minor">
+            <a:schemeClr val="lt1"/>
+          </a:fontRef>
+        </p:style>
+        <p:txBody>
+          <a:bodyPr rtlCol="0" anchor="ctr"/>
+          <a:lstStyle/>
+          <a:p>
+            <a:pPr algn="ctr"/>
+          </a:p>
+        </p:txBody>
+      </p:sp>
+      <p:sp>
+        <p:nvSpPr>
+          <p:cNvPr id="12" name="Rounded Rectangle 11"/>
+          <p:cNvSpPr/>
+          <p:nvPr/>
+        </p:nvSpPr>
+        <p:spPr>
+          <a:xfrm>
+            <a:off x="731519" y="1508760"/>
+            <a:ext cx="10728655" cy="32004"/>
+          </a:xfrm>
+          <a:prstGeom prst="roundRect">
+            <a:avLst>
+              <a:gd name="adj" fmla="val 50000"/>
+            </a:avLst>
+          </a:prstGeom>
+          <a:solidFill>
+            <a:srgbClr val="FFFFFF">
+              <a:alpha val="85000"/>
+            </a:srgbClr>
+          </a:solidFill>
+          <a:ln>
+            <a:noFill/>
+          </a:ln>
+          <a:effectLst/>
+        </p:spPr>
+        <p:style>
+          <a:lnRef idx="1">
+            <a:schemeClr val="accent1"/>
+          </a:lnRef>
+          <a:fillRef idx="3">
+            <a:schemeClr val="accent1"/>
+          </a:fillRef>
+          <a:effectRef idx="2">
+            <a:schemeClr val="accent1"/>
+          </a:effectRef>
+          <a:fontRef idx="minor">
+            <a:schemeClr val="lt1"/>
+          </a:fontRef>
+        </p:style>
+        <p:txBody>
+          <a:bodyPr rtlCol="0" anchor="ctr"/>
+          <a:lstStyle/>
+          <a:p>
+            <a:pPr algn="ctr"/>
+          </a:p>
+        </p:txBody>
+      </p:sp>
+      <p:sp>
+        <p:nvSpPr>
+          <p:cNvPr id="13" name="Rounded Rectangle 12"/>
+          <p:cNvSpPr/>
+          <p:nvPr/>
+        </p:nvSpPr>
+        <p:spPr>
+          <a:xfrm>
+            <a:off x="548640" y="1591056"/>
+            <a:ext cx="64008" cy="3080258"/>
+          </a:xfrm>
+          <a:prstGeom prst="roundRect">
+            <a:avLst>
+              <a:gd name="adj" fmla="val 50000"/>
+            </a:avLst>
+          </a:prstGeom>
+          <a:solidFill>
+            <a:srgbClr val="8D6A2A"/>
+          </a:solidFill>
+          <a:ln>
+            <a:noFill/>
+          </a:ln>
+          <a:effectLst>
+            <a:outerShdw blurRad="203200" dist="50800" dir="5400000" algn="t" rotWithShape="0">
+              <a:srgbClr val="1A2340">
+                <a:alpha val="20000"/>
+              </a:srgbClr>
+            </a:outerShdw>
+          </a:effectLst>
+          <a:scene3d>
+            <a:camera prst="orthographicFront"/>
+            <a:lightRig rig="threePt" dir="t"/>
+          </a:scene3d>
+          <a:sp3d>
+            <a:bevelT w="44450" h="25400" prst="softRound"/>
+          </a:sp3d>
+        </p:spPr>
+        <p:style>
+          <a:lnRef idx="1">
+            <a:schemeClr val="accent1"/>
+          </a:lnRef>
+          <a:fillRef idx="3">
+            <a:schemeClr val="accent1"/>
+          </a:fillRef>
+          <a:effectRef idx="2">
+            <a:schemeClr val="accent1"/>
+          </a:effectRef>
+          <a:fontRef idx="minor">
+            <a:schemeClr val="lt1"/>
+          </a:fontRef>
+        </p:style>
+        <p:txBody>
+          <a:bodyPr rtlCol="0" anchor="ctr"/>
+          <a:lstStyle/>
+          <a:p>
+            <a:pPr algn="ctr"/>
+          </a:p>
+        </p:txBody>
+      </p:sp>
+      <p:sp>
+        <p:nvSpPr>
+          <p:cNvPr id="14" name="TextBox 13"/>
           <p:cNvSpPr txBox="1"/>
           <p:nvPr/>
         </p:nvSpPr>
         <p:spPr>
           <a:xfrm>
-            <a:off x="548640" y="1554480"/>
-            <a:ext cx="4480560" cy="4617720"/>
+            <a:off x="777240" y="1554480"/>
+            <a:ext cx="4251960" cy="4617720"/>
           </a:xfrm>
           <a:prstGeom prst="rect">
             <a:avLst/>
@@ -23429,7 +26021,7 @@
       </p:sp>
       <p:sp>
         <p:nvSpPr>
-          <p:cNvPr id="12" name="Oval 11"/>
+          <p:cNvPr id="15" name="Oval 14"/>
           <p:cNvSpPr/>
           <p:nvPr/>
         </p:nvSpPr>
@@ -23482,7 +26074,7 @@
       </p:sp>
       <p:sp>
         <p:nvSpPr>
-          <p:cNvPr id="13" name="TextBox 12"/>
+          <p:cNvPr id="16" name="TextBox 15"/>
           <p:cNvSpPr txBox="1"/>
           <p:nvPr/>
         </p:nvSpPr>
@@ -23516,7 +26108,7 @@
       </p:sp>
       <p:sp>
         <p:nvSpPr>
-          <p:cNvPr id="14" name="Oval 13"/>
+          <p:cNvPr id="17" name="Oval 16"/>
           <p:cNvSpPr/>
           <p:nvPr/>
         </p:nvSpPr>
@@ -23569,7 +26161,7 @@
       </p:sp>
       <p:sp>
         <p:nvSpPr>
-          <p:cNvPr id="15" name="TextBox 14"/>
+          <p:cNvPr id="18" name="TextBox 17"/>
           <p:cNvSpPr txBox="1"/>
           <p:nvPr/>
         </p:nvSpPr>
@@ -23603,7 +26195,7 @@
       </p:sp>
       <p:sp>
         <p:nvSpPr>
-          <p:cNvPr id="16" name="Oval 15"/>
+          <p:cNvPr id="19" name="Oval 18"/>
           <p:cNvSpPr/>
           <p:nvPr/>
         </p:nvSpPr>
@@ -23656,7 +26248,7 @@
       </p:sp>
       <p:sp>
         <p:nvSpPr>
-          <p:cNvPr id="17" name="TextBox 16"/>
+          <p:cNvPr id="20" name="TextBox 19"/>
           <p:cNvSpPr txBox="1"/>
           <p:nvPr/>
         </p:nvSpPr>
@@ -23690,7 +26282,7 @@
       </p:sp>
       <p:sp>
         <p:nvSpPr>
-          <p:cNvPr id="18" name="Oval 17"/>
+          <p:cNvPr id="21" name="Oval 20"/>
           <p:cNvSpPr/>
           <p:nvPr/>
         </p:nvSpPr>
@@ -23743,7 +26335,7 @@
       </p:sp>
       <p:sp>
         <p:nvSpPr>
-          <p:cNvPr id="19" name="TextBox 18"/>
+          <p:cNvPr id="22" name="TextBox 21"/>
           <p:cNvSpPr txBox="1"/>
           <p:nvPr/>
         </p:nvSpPr>
@@ -23777,7 +26369,7 @@
       </p:sp>
       <p:sp>
         <p:nvSpPr>
-          <p:cNvPr id="20" name="Oval 19"/>
+          <p:cNvPr id="23" name="Oval 22"/>
           <p:cNvSpPr/>
           <p:nvPr/>
         </p:nvSpPr>
@@ -23830,7 +26422,7 @@
       </p:sp>
       <p:sp>
         <p:nvSpPr>
-          <p:cNvPr id="21" name="TextBox 20"/>
+          <p:cNvPr id="24" name="TextBox 23"/>
           <p:cNvSpPr txBox="1"/>
           <p:nvPr/>
         </p:nvSpPr>
@@ -24245,14 +26837,177 @@
       </p:pic>
       <p:sp>
         <p:nvSpPr>
-          <p:cNvPr id="11" name="TextBox 10"/>
+          <p:cNvPr id="11" name="Rounded Rectangle 10"/>
+          <p:cNvSpPr/>
+          <p:nvPr/>
+        </p:nvSpPr>
+        <p:spPr>
+          <a:xfrm>
+            <a:off x="411479" y="1444752"/>
+            <a:ext cx="11368735" cy="4800600"/>
+          </a:xfrm>
+          <a:prstGeom prst="roundRect">
+            <a:avLst>
+              <a:gd name="adj" fmla="val 4000"/>
+            </a:avLst>
+          </a:prstGeom>
+          <a:solidFill>
+            <a:srgbClr val="FFFFFF">
+              <a:alpha val="84000"/>
+            </a:srgbClr>
+          </a:solidFill>
+          <a:ln w="19050">
+            <a:solidFill>
+              <a:srgbClr val="FFFFFF"/>
+            </a:solidFill>
+          </a:ln>
+          <a:effectLst>
+            <a:outerShdw blurRad="203200" dist="50800" dir="5400000" algn="t" rotWithShape="0">
+              <a:srgbClr val="1A2340">
+                <a:alpha val="20000"/>
+              </a:srgbClr>
+            </a:outerShdw>
+          </a:effectLst>
+        </p:spPr>
+        <p:style>
+          <a:lnRef idx="1">
+            <a:schemeClr val="accent1"/>
+          </a:lnRef>
+          <a:fillRef idx="3">
+            <a:schemeClr val="accent1"/>
+          </a:fillRef>
+          <a:effectRef idx="2">
+            <a:schemeClr val="accent1"/>
+          </a:effectRef>
+          <a:fontRef idx="minor">
+            <a:schemeClr val="lt1"/>
+          </a:fontRef>
+        </p:style>
+        <p:txBody>
+          <a:bodyPr rtlCol="0" anchor="ctr"/>
+          <a:lstStyle/>
+          <a:p>
+            <a:pPr algn="ctr"/>
+          </a:p>
+        </p:txBody>
+      </p:sp>
+      <p:sp>
+        <p:nvSpPr>
+          <p:cNvPr id="12" name="Rounded Rectangle 11"/>
+          <p:cNvSpPr/>
+          <p:nvPr/>
+        </p:nvSpPr>
+        <p:spPr>
+          <a:xfrm>
+            <a:off x="731519" y="1508760"/>
+            <a:ext cx="10728655" cy="32004"/>
+          </a:xfrm>
+          <a:prstGeom prst="roundRect">
+            <a:avLst>
+              <a:gd name="adj" fmla="val 50000"/>
+            </a:avLst>
+          </a:prstGeom>
+          <a:solidFill>
+            <a:srgbClr val="FFFFFF">
+              <a:alpha val="85000"/>
+            </a:srgbClr>
+          </a:solidFill>
+          <a:ln>
+            <a:noFill/>
+          </a:ln>
+          <a:effectLst/>
+        </p:spPr>
+        <p:style>
+          <a:lnRef idx="1">
+            <a:schemeClr val="accent1"/>
+          </a:lnRef>
+          <a:fillRef idx="3">
+            <a:schemeClr val="accent1"/>
+          </a:fillRef>
+          <a:effectRef idx="2">
+            <a:schemeClr val="accent1"/>
+          </a:effectRef>
+          <a:fontRef idx="minor">
+            <a:schemeClr val="lt1"/>
+          </a:fontRef>
+        </p:style>
+        <p:txBody>
+          <a:bodyPr rtlCol="0" anchor="ctr"/>
+          <a:lstStyle/>
+          <a:p>
+            <a:pPr algn="ctr"/>
+          </a:p>
+        </p:txBody>
+      </p:sp>
+      <p:sp>
+        <p:nvSpPr>
+          <p:cNvPr id="13" name="Rounded Rectangle 12"/>
+          <p:cNvSpPr/>
+          <p:nvPr/>
+        </p:nvSpPr>
+        <p:spPr>
+          <a:xfrm>
+            <a:off x="548640" y="1591056"/>
+            <a:ext cx="64008" cy="315468"/>
+          </a:xfrm>
+          <a:prstGeom prst="roundRect">
+            <a:avLst>
+              <a:gd name="adj" fmla="val 50000"/>
+            </a:avLst>
+          </a:prstGeom>
+          <a:solidFill>
+            <a:srgbClr val="8D6A2A"/>
+          </a:solidFill>
+          <a:ln>
+            <a:noFill/>
+          </a:ln>
+          <a:effectLst>
+            <a:outerShdw blurRad="203200" dist="50800" dir="5400000" algn="t" rotWithShape="0">
+              <a:srgbClr val="1A2340">
+                <a:alpha val="20000"/>
+              </a:srgbClr>
+            </a:outerShdw>
+          </a:effectLst>
+          <a:scene3d>
+            <a:camera prst="orthographicFront"/>
+            <a:lightRig rig="threePt" dir="t"/>
+          </a:scene3d>
+          <a:sp3d>
+            <a:bevelT w="44450" h="25400" prst="softRound"/>
+          </a:sp3d>
+        </p:spPr>
+        <p:style>
+          <a:lnRef idx="1">
+            <a:schemeClr val="accent1"/>
+          </a:lnRef>
+          <a:fillRef idx="3">
+            <a:schemeClr val="accent1"/>
+          </a:fillRef>
+          <a:effectRef idx="2">
+            <a:schemeClr val="accent1"/>
+          </a:effectRef>
+          <a:fontRef idx="minor">
+            <a:schemeClr val="lt1"/>
+          </a:fontRef>
+        </p:style>
+        <p:txBody>
+          <a:bodyPr rtlCol="0" anchor="ctr"/>
+          <a:lstStyle/>
+          <a:p>
+            <a:pPr algn="ctr"/>
+          </a:p>
+        </p:txBody>
+      </p:sp>
+      <p:sp>
+        <p:nvSpPr>
+          <p:cNvPr id="14" name="TextBox 13"/>
           <p:cNvSpPr txBox="1"/>
           <p:nvPr/>
         </p:nvSpPr>
         <p:spPr>
           <a:xfrm>
-            <a:off x="548640" y="1554480"/>
-            <a:ext cx="11094415" cy="498348"/>
+            <a:off x="777240" y="1554480"/>
+            <a:ext cx="10865815" cy="498348"/>
           </a:xfrm>
           <a:prstGeom prst="rect">
             <a:avLst/>
@@ -24284,7 +27039,7 @@
       </p:sp>
       <p:sp>
         <p:nvSpPr>
-          <p:cNvPr id="12" name="Oval 11"/>
+          <p:cNvPr id="15" name="Oval 14"/>
           <p:cNvSpPr/>
           <p:nvPr/>
         </p:nvSpPr>
@@ -24337,7 +27092,7 @@
       </p:sp>
       <p:sp>
         <p:nvSpPr>
-          <p:cNvPr id="13" name="TextBox 12"/>
+          <p:cNvPr id="16" name="TextBox 15"/>
           <p:cNvSpPr txBox="1"/>
           <p:nvPr/>
         </p:nvSpPr>
@@ -24371,7 +27126,7 @@
       </p:sp>
       <p:sp>
         <p:nvSpPr>
-          <p:cNvPr id="14" name="Oval 13"/>
+          <p:cNvPr id="17" name="Oval 16"/>
           <p:cNvSpPr/>
           <p:nvPr/>
         </p:nvSpPr>
@@ -24424,7 +27179,7 @@
       </p:sp>
       <p:sp>
         <p:nvSpPr>
-          <p:cNvPr id="15" name="TextBox 14"/>
+          <p:cNvPr id="18" name="TextBox 17"/>
           <p:cNvSpPr txBox="1"/>
           <p:nvPr/>
         </p:nvSpPr>
@@ -24458,7 +27213,7 @@
       </p:sp>
       <p:sp>
         <p:nvSpPr>
-          <p:cNvPr id="16" name="Oval 15"/>
+          <p:cNvPr id="19" name="Oval 18"/>
           <p:cNvSpPr/>
           <p:nvPr/>
         </p:nvSpPr>
@@ -24511,7 +27266,7 @@
       </p:sp>
       <p:sp>
         <p:nvSpPr>
-          <p:cNvPr id="17" name="TextBox 16"/>
+          <p:cNvPr id="20" name="TextBox 19"/>
           <p:cNvSpPr txBox="1"/>
           <p:nvPr/>
         </p:nvSpPr>
@@ -24932,6 +27687,110 @@
         </p:nvSpPr>
         <p:spPr>
           <a:xfrm>
+            <a:off x="411479" y="1444752"/>
+            <a:ext cx="11368735" cy="4800600"/>
+          </a:xfrm>
+          <a:prstGeom prst="roundRect">
+            <a:avLst>
+              <a:gd name="adj" fmla="val 4000"/>
+            </a:avLst>
+          </a:prstGeom>
+          <a:solidFill>
+            <a:srgbClr val="FFFFFF">
+              <a:alpha val="84000"/>
+            </a:srgbClr>
+          </a:solidFill>
+          <a:ln w="19050">
+            <a:solidFill>
+              <a:srgbClr val="FFFFFF"/>
+            </a:solidFill>
+          </a:ln>
+          <a:effectLst>
+            <a:outerShdw blurRad="203200" dist="50800" dir="5400000" algn="t" rotWithShape="0">
+              <a:srgbClr val="1A2340">
+                <a:alpha val="20000"/>
+              </a:srgbClr>
+            </a:outerShdw>
+          </a:effectLst>
+        </p:spPr>
+        <p:style>
+          <a:lnRef idx="1">
+            <a:schemeClr val="accent1"/>
+          </a:lnRef>
+          <a:fillRef idx="3">
+            <a:schemeClr val="accent1"/>
+          </a:fillRef>
+          <a:effectRef idx="2">
+            <a:schemeClr val="accent1"/>
+          </a:effectRef>
+          <a:fontRef idx="minor">
+            <a:schemeClr val="lt1"/>
+          </a:fontRef>
+        </p:style>
+        <p:txBody>
+          <a:bodyPr rtlCol="0" anchor="ctr"/>
+          <a:lstStyle/>
+          <a:p>
+            <a:pPr algn="ctr"/>
+          </a:p>
+        </p:txBody>
+      </p:sp>
+      <p:sp>
+        <p:nvSpPr>
+          <p:cNvPr id="12" name="Rounded Rectangle 11"/>
+          <p:cNvSpPr/>
+          <p:nvPr/>
+        </p:nvSpPr>
+        <p:spPr>
+          <a:xfrm>
+            <a:off x="731519" y="1508760"/>
+            <a:ext cx="10728655" cy="32004"/>
+          </a:xfrm>
+          <a:prstGeom prst="roundRect">
+            <a:avLst>
+              <a:gd name="adj" fmla="val 50000"/>
+            </a:avLst>
+          </a:prstGeom>
+          <a:solidFill>
+            <a:srgbClr val="FFFFFF">
+              <a:alpha val="85000"/>
+            </a:srgbClr>
+          </a:solidFill>
+          <a:ln>
+            <a:noFill/>
+          </a:ln>
+          <a:effectLst/>
+        </p:spPr>
+        <p:style>
+          <a:lnRef idx="1">
+            <a:schemeClr val="accent1"/>
+          </a:lnRef>
+          <a:fillRef idx="3">
+            <a:schemeClr val="accent1"/>
+          </a:fillRef>
+          <a:effectRef idx="2">
+            <a:schemeClr val="accent1"/>
+          </a:effectRef>
+          <a:fontRef idx="minor">
+            <a:schemeClr val="lt1"/>
+          </a:fontRef>
+        </p:style>
+        <p:txBody>
+          <a:bodyPr rtlCol="0" anchor="ctr"/>
+          <a:lstStyle/>
+          <a:p>
+            <a:pPr algn="ctr"/>
+          </a:p>
+        </p:txBody>
+      </p:sp>
+      <p:sp>
+        <p:nvSpPr>
+          <p:cNvPr id="13" name="Rounded Rectangle 12"/>
+          <p:cNvSpPr/>
+          <p:nvPr/>
+        </p:nvSpPr>
+        <p:spPr>
+          <a:xfrm>
             <a:off x="1645919" y="1561591"/>
             <a:ext cx="8899855" cy="4610608"/>
           </a:xfrm>
@@ -24982,7 +27841,7 @@
       </p:sp>
       <p:sp>
         <p:nvSpPr>
-          <p:cNvPr id="12" name="Rounded Rectangle 11"/>
+          <p:cNvPr id="14" name="Rounded Rectangle 13"/>
           <p:cNvSpPr/>
           <p:nvPr/>
         </p:nvSpPr>
@@ -25030,7 +27889,7 @@
       </p:sp>
       <p:sp>
         <p:nvSpPr>
-          <p:cNvPr id="13" name="Rounded Rectangle 12"/>
+          <p:cNvPr id="15" name="Rounded Rectangle 14"/>
           <p:cNvSpPr/>
           <p:nvPr/>
         </p:nvSpPr>
@@ -25098,7 +27957,7 @@
       </p:sp>
       <p:sp>
         <p:nvSpPr>
-          <p:cNvPr id="14" name="TextBox 13"/>
+          <p:cNvPr id="16" name="TextBox 15"/>
           <p:cNvSpPr txBox="1"/>
           <p:nvPr/>
         </p:nvSpPr>
